--- a/备选资产/结构图/双向对比-001/example.pptx
+++ b/备选资产/结构图/双向对比-001/example.pptx
@@ -2,13 +2,13 @@
 <file path=ppt/presentation.xml><?xml version="1.0" encoding="utf-8"?>
 <p:presentation xmlns:p="http://schemas.openxmlformats.org/presentationml/2006/main">
   <p:sldMasterIdLst>
-    <p:sldMasterId xmlns:r="http://schemas.openxmlformats.org/officeDocument/2006/relationships" id="2147483648" r:id="R857c89ab9ab44570"/>
+    <p:sldMasterId xmlns:r="http://schemas.openxmlformats.org/officeDocument/2006/relationships" id="2147483648" r:id="R24839025f35f4329"/>
   </p:sldMasterIdLst>
   <p:notesMasterIdLst>
-    <p:notesMasterId xmlns:r="http://schemas.openxmlformats.org/officeDocument/2006/relationships" r:id="Rb8318d96908a45b7"/>
+    <p:notesMasterId xmlns:r="http://schemas.openxmlformats.org/officeDocument/2006/relationships" r:id="R84c323c22e3c4ed4"/>
   </p:notesMasterIdLst>
   <p:sldIdLst>
-    <p:sldId xmlns:r="http://schemas.openxmlformats.org/officeDocument/2006/relationships" id="256" r:id="R3ff567d1025c4280"/>
+    <p:sldId xmlns:r="http://schemas.openxmlformats.org/officeDocument/2006/relationships" id="256" r:id="R0bc85d79448640d7"/>
   </p:sldIdLst>
   <p:sldSz cx="12192000" cy="6858000"/>
   <p:notesSz cx="6858000" cy="9144000"/>
@@ -506,7 +506,7 @@
   </p:cSld>
   <p:clrMap bg1="lt1" tx1="dk1" bg2="lt2" tx2="dk2" accent1="accent1" accent2="accent2" accent3="accent3" accent4="accent4" accent5="accent5" accent6="accent6" hlink="hlink" folHlink="folHlink"/>
   <p:sldLayoutIdLst>
-    <p:sldLayoutId xmlns:r="http://schemas.openxmlformats.org/officeDocument/2006/relationships" id="2147483649" r:id="R19c5e25291c84cda"/>
+    <p:sldLayoutId xmlns:r="http://schemas.openxmlformats.org/officeDocument/2006/relationships" id="2147483649" r:id="R363fdc0768854e7d"/>
   </p:sldLayoutIdLst>
   <p:txStyles>
     <p:titleStyle>
@@ -1054,10 +1054,10 @@
       </p:grpSpPr>
       <p:sp>
         <p:nvSpPr>
-          <p:cNvPr id="13" name="">
-            <a:extLst xmlns:a="http://schemas.openxmlformats.org/drawingml/2006/main">
-              <a:ext uri="{FF2B5EF4-FFF2-40B4-BE49-F238E27FC236}">
-                <a16:creationId xmlns:a16="http://schemas.microsoft.com/office/drawing/2014/main" id="{FBC065D0-93E1-4D77-9F51-D9CFEF838A77}"/>
+          <p:cNvPr id="38" name="">
+            <a:extLst xmlns:a="http://schemas.openxmlformats.org/drawingml/2006/main">
+              <a:ext uri="{FF2B5EF4-FFF2-40B4-BE49-F238E27FC236}">
+                <a16:creationId xmlns:a16="http://schemas.microsoft.com/office/drawing/2014/main" id="{2233E5D4-92A2-4A63-BA52-A7981ECC21A5}"/>
               </a:ext>
             </a:extLst>
           </p:cNvPr>
@@ -1105,7 +1105,7 @@
                 <a:ea typeface="Microsoft YaHei"/>
                 <a:cs typeface="Microsoft YaHei"/>
               </a:rPr>
-              <a:t>双向对比</a:t>
+              <a:t>两种生成路线</a:t>
             </a:r>
           </a:p>
         </p:txBody>
@@ -1115,7 +1115,7 @@
           <p:cNvPr id="2" name="">
             <a:extLst xmlns:a="http://schemas.openxmlformats.org/drawingml/2006/main">
               <a:ext uri="{FF2B5EF4-FFF2-40B4-BE49-F238E27FC236}">
-                <a16:creationId xmlns:a16="http://schemas.microsoft.com/office/drawing/2014/main" id="{2BE3B758-6111-41FE-B283-C365911C1A05}"/>
+                <a16:creationId xmlns:a16="http://schemas.microsoft.com/office/drawing/2014/main" id="{3DF31873-1F47-46CD-AD65-693703119EA1}"/>
               </a:ext>
             </a:extLst>
           </p:cNvPr>
@@ -1173,28 +1173,1745 @@
           <p:cNvPr id="3" name="">
             <a:extLst xmlns:a="http://schemas.openxmlformats.org/drawingml/2006/main">
               <a:ext uri="{FF2B5EF4-FFF2-40B4-BE49-F238E27FC236}">
-                <a16:creationId xmlns:a16="http://schemas.microsoft.com/office/drawing/2014/main" id="{61DF2871-EFB7-49C3-B080-A89F629E5F75}"/>
-              </a:ext>
-            </a:extLst>
-          </p:cNvPr>
-          <p:cNvSpPr>
-            <a:spLocks xmlns:a="http://schemas.openxmlformats.org/drawingml/2006/main" noGrp="1"/>
-          </p:cNvSpPr>
-          <p:nvPr/>
-        </p:nvSpPr>
-        <p:spPr>
-          <a:xfrm xmlns:a="http://schemas.openxmlformats.org/drawingml/2006/main">
-            <a:off x="3143250" y="2143125"/>
-            <a:ext cx="2381250" cy="2381250"/>
+                <a16:creationId xmlns:a16="http://schemas.microsoft.com/office/drawing/2014/main" id="{224688C4-FA56-41F0-A4B5-B73CAE648E29}"/>
+              </a:ext>
+            </a:extLst>
+          </p:cNvPr>
+          <p:cNvSpPr>
+            <a:spLocks xmlns:a="http://schemas.openxmlformats.org/drawingml/2006/main" noGrp="1"/>
+          </p:cNvSpPr>
+          <p:nvPr/>
+        </p:nvSpPr>
+        <p:spPr>
+          <a:xfrm xmlns:a="http://schemas.openxmlformats.org/drawingml/2006/main">
+            <a:off x="381000" y="1285875"/>
+            <a:ext cx="11430000" cy="4953000"/>
+          </a:xfrm>
+          <a:prstGeom xmlns:a="http://schemas.openxmlformats.org/drawingml/2006/main" prst="roundRect">
+            <a:avLst>
+              <a:gd name="adj" fmla="val 0"/>
+            </a:avLst>
+          </a:prstGeom>
+          <a:gradFill xmlns:a="http://schemas.openxmlformats.org/drawingml/2006/main">
+            <a:gsLst>
+              <a:gs pos="0">
+                <a:srgbClr val="FFFFFF"/>
+              </a:gs>
+              <a:gs pos="52000">
+                <a:srgbClr val="EEF6FC"/>
+              </a:gs>
+              <a:gs pos="100000">
+                <a:srgbClr val="FFFFFF"/>
+              </a:gs>
+            </a:gsLst>
+            <a:lin ang="5400000"/>
+          </a:gradFill>
+          <a:ln xmlns:a="http://schemas.openxmlformats.org/drawingml/2006/main" w="0">
+            <a:noFill/>
+            <a:prstDash val="solid"/>
+          </a:ln>
+        </p:spPr>
+      </p:sp>
+      <p:sp>
+        <p:nvSpPr>
+          <p:cNvPr id="4" name="PPAGENT_QA|parent=comparison-left-panel|domains=comparison-panels">
+            <a:extLst xmlns:a="http://schemas.openxmlformats.org/drawingml/2006/main">
+              <a:ext uri="{FF2B5EF4-FFF2-40B4-BE49-F238E27FC236}">
+                <a16:creationId xmlns:a16="http://schemas.microsoft.com/office/drawing/2014/main" id="{C32949DA-2A60-4DF1-B1E5-936BE62F568B}"/>
+              </a:ext>
+            </a:extLst>
+          </p:cNvPr>
+          <p:cNvSpPr>
+            <a:spLocks xmlns:a="http://schemas.openxmlformats.org/drawingml/2006/main" noGrp="1"/>
+          </p:cNvSpPr>
+          <p:nvPr/>
+        </p:nvSpPr>
+        <p:spPr>
+          <a:xfrm xmlns:a="http://schemas.openxmlformats.org/drawingml/2006/main">
+            <a:off x="857250" y="1485900"/>
+            <a:ext cx="4191000" cy="4400550"/>
+          </a:xfrm>
+          <a:prstGeom xmlns:a="http://schemas.openxmlformats.org/drawingml/2006/main" prst="roundRect">
+            <a:avLst>
+              <a:gd name="adj" fmla="val 2727"/>
+            </a:avLst>
+          </a:prstGeom>
+          <a:solidFill xmlns:a="http://schemas.openxmlformats.org/drawingml/2006/main">
+            <a:srgbClr val="FFFFFF">
+              <a:alpha val="96000"/>
+            </a:srgbClr>
+          </a:solidFill>
+          <a:ln xmlns:a="http://schemas.openxmlformats.org/drawingml/2006/main" w="14288">
+            <a:solidFill>
+              <a:srgbClr val="A7B4C4"/>
+            </a:solidFill>
+            <a:prstDash val="dash"/>
+          </a:ln>
+        </p:spPr>
+        <p:style>
+          <a:lnRef xmlns:a="http://schemas.openxmlformats.org/drawingml/2006/main" idx="0"/>
+          <a:fillRef xmlns:a="http://schemas.openxmlformats.org/drawingml/2006/main" idx="0"/>
+          <a:effectRef xmlns:a="http://schemas.openxmlformats.org/drawingml/2006/main" idx="6"/>
+          <a:fontRef xmlns:a="http://schemas.openxmlformats.org/drawingml/2006/main" idx="major"/>
+        </p:style>
+      </p:sp>
+      <p:sp>
+        <p:nvSpPr>
+          <p:cNvPr id="5" name="PPAGENT_QA|within=comparison-left-panel|role=header-surface">
+            <a:extLst xmlns:a="http://schemas.openxmlformats.org/drawingml/2006/main">
+              <a:ext uri="{FF2B5EF4-FFF2-40B4-BE49-F238E27FC236}">
+                <a16:creationId xmlns:a16="http://schemas.microsoft.com/office/drawing/2014/main" id="{EB8B3F2E-9EA2-49C0-9882-3EF6F8E5539D}"/>
+              </a:ext>
+            </a:extLst>
+          </p:cNvPr>
+          <p:cNvSpPr>
+            <a:spLocks xmlns:a="http://schemas.openxmlformats.org/drawingml/2006/main" noGrp="1"/>
+          </p:cNvSpPr>
+          <p:nvPr/>
+        </p:nvSpPr>
+        <p:spPr>
+          <a:xfrm xmlns:a="http://schemas.openxmlformats.org/drawingml/2006/main">
+            <a:off x="857250" y="1485900"/>
+            <a:ext cx="4191000" cy="685800"/>
+          </a:xfrm>
+          <a:prstGeom xmlns:a="http://schemas.openxmlformats.org/drawingml/2006/main" prst="roundRect">
+            <a:avLst>
+              <a:gd name="adj" fmla="val 16667"/>
+            </a:avLst>
+          </a:prstGeom>
+          <a:gradFill xmlns:a="http://schemas.openxmlformats.org/drawingml/2006/main">
+            <a:gsLst>
+              <a:gs pos="0">
+                <a:srgbClr val="7E8A9A"/>
+              </a:gs>
+              <a:gs pos="100000">
+                <a:srgbClr val="9BA6B4"/>
+              </a:gs>
+            </a:gsLst>
+            <a:lin ang="0"/>
+          </a:gradFill>
+          <a:ln xmlns:a="http://schemas.openxmlformats.org/drawingml/2006/main" w="0">
+            <a:noFill/>
+            <a:prstDash val="solid"/>
+          </a:ln>
+        </p:spPr>
+        <p:style>
+          <a:lnRef xmlns:a="http://schemas.openxmlformats.org/drawingml/2006/main" idx="0"/>
+          <a:fillRef xmlns:a="http://schemas.openxmlformats.org/drawingml/2006/main" idx="0"/>
+          <a:effectRef xmlns:a="http://schemas.openxmlformats.org/drawingml/2006/main" idx="6"/>
+          <a:fontRef xmlns:a="http://schemas.openxmlformats.org/drawingml/2006/main" idx="major"/>
+        </p:style>
+      </p:sp>
+      <p:sp>
+        <p:nvSpPr>
+          <p:cNvPr id="6" name="PPAGENT_QA|within=comparison-left-panel|role=header-title">
+            <a:extLst xmlns:a="http://schemas.openxmlformats.org/drawingml/2006/main">
+              <a:ext uri="{FF2B5EF4-FFF2-40B4-BE49-F238E27FC236}">
+                <a16:creationId xmlns:a16="http://schemas.microsoft.com/office/drawing/2014/main" id="{ABF81CA0-9157-4DAD-B840-48C9D94555C2}"/>
+              </a:ext>
+            </a:extLst>
+          </p:cNvPr>
+          <p:cNvSpPr>
+            <a:spLocks xmlns:a="http://schemas.openxmlformats.org/drawingml/2006/main" noGrp="1"/>
+          </p:cNvSpPr>
+          <p:nvPr/>
+        </p:nvSpPr>
+        <p:spPr>
+          <a:xfrm xmlns:a="http://schemas.openxmlformats.org/drawingml/2006/main">
+            <a:off x="1181100" y="1581150"/>
+            <a:ext cx="3543300" cy="495300"/>
+          </a:xfrm>
+          <a:prstGeom xmlns:a="http://schemas.openxmlformats.org/drawingml/2006/main" prst="rect">
+            <a:avLst/>
+          </a:prstGeom>
+          <a:noFill xmlns:a="http://schemas.openxmlformats.org/drawingml/2006/main"/>
+          <a:ln xmlns:a="http://schemas.openxmlformats.org/drawingml/2006/main" w="0">
+            <a:noFill/>
+            <a:prstDash val="solid"/>
+          </a:ln>
+        </p:spPr>
+        <p:txBody>
+          <a:bodyPr xmlns:a="http://schemas.openxmlformats.org/drawingml/2006/main" lIns="0" tIns="0" rIns="0" bIns="0" anchor="ctr">
+            <a:normAutofit fontScale="100000"/>
+          </a:bodyPr>
+          <a:lstStyle xmlns:a="http://schemas.openxmlformats.org/drawingml/2006/main"/>
+          <a:p xmlns:a="http://schemas.openxmlformats.org/drawingml/2006/main">
+            <a:pPr algn="ctr">
+              <a:defRPr sz="1800" b="1">
+                <a:solidFill>
+                  <a:srgbClr val="FFFFFF"/>
+                </a:solidFill>
+                <a:latin typeface="Microsoft YaHei"/>
+                <a:ea typeface="Microsoft YaHei"/>
+                <a:cs typeface="Microsoft YaHei"/>
+              </a:defRPr>
+            </a:pPr>
+            <a:r>
+              <a:rPr sz="1800" b="1">
+                <a:solidFill>
+                  <a:srgbClr val="FFFFFF"/>
+                </a:solidFill>
+                <a:latin typeface="Microsoft YaHei"/>
+                <a:ea typeface="Microsoft YaHei"/>
+                <a:cs typeface="Microsoft YaHei"/>
+              </a:rPr>
+              <a:t>自由生成</a:t>
+            </a:r>
+          </a:p>
+        </p:txBody>
+      </p:sp>
+      <p:sp>
+        <p:nvSpPr>
+          <p:cNvPr id="7" name="PPAGENT_QA|parent=comparison-left-row-0|domains=comparison-left-rows">
+            <a:extLst xmlns:a="http://schemas.openxmlformats.org/drawingml/2006/main">
+              <a:ext uri="{FF2B5EF4-FFF2-40B4-BE49-F238E27FC236}">
+                <a16:creationId xmlns:a16="http://schemas.microsoft.com/office/drawing/2014/main" id="{330864AF-9742-48D4-83D4-1B8B2BFC81FE}"/>
+              </a:ext>
+            </a:extLst>
+          </p:cNvPr>
+          <p:cNvSpPr>
+            <a:spLocks xmlns:a="http://schemas.openxmlformats.org/drawingml/2006/main" noGrp="1"/>
+          </p:cNvSpPr>
+          <p:nvPr/>
+        </p:nvSpPr>
+        <p:spPr>
+          <a:xfrm xmlns:a="http://schemas.openxmlformats.org/drawingml/2006/main">
+            <a:off x="1219200" y="2343150"/>
+            <a:ext cx="3467100" cy="514350"/>
+          </a:xfrm>
+          <a:prstGeom xmlns:a="http://schemas.openxmlformats.org/drawingml/2006/main" prst="roundRect">
+            <a:avLst>
+              <a:gd name="adj" fmla="val 50000"/>
+            </a:avLst>
+          </a:prstGeom>
+          <a:gradFill xmlns:a="http://schemas.openxmlformats.org/drawingml/2006/main">
+            <a:gsLst>
+              <a:gs pos="0">
+                <a:srgbClr val="7E8A9A"/>
+              </a:gs>
+              <a:gs pos="100000">
+                <a:srgbClr val="9BA6B4"/>
+              </a:gs>
+            </a:gsLst>
+            <a:lin ang="0"/>
+          </a:gradFill>
+          <a:ln xmlns:a="http://schemas.openxmlformats.org/drawingml/2006/main" w="9525">
+            <a:solidFill>
+              <a:srgbClr val="6B7684"/>
+            </a:solidFill>
+            <a:prstDash val="solid"/>
+          </a:ln>
+        </p:spPr>
+        <p:style>
+          <a:lnRef xmlns:a="http://schemas.openxmlformats.org/drawingml/2006/main" idx="0"/>
+          <a:fillRef xmlns:a="http://schemas.openxmlformats.org/drawingml/2006/main" idx="0"/>
+          <a:effectRef xmlns:a="http://schemas.openxmlformats.org/drawingml/2006/main" idx="6"/>
+          <a:fontRef xmlns:a="http://schemas.openxmlformats.org/drawingml/2006/main" idx="major"/>
+        </p:style>
+      </p:sp>
+      <p:sp>
+        <p:nvSpPr>
+          <p:cNvPr id="8" name="PPAGENT_QA|within=comparison-left-row-0|role=status-marker">
+            <a:extLst xmlns:a="http://schemas.openxmlformats.org/drawingml/2006/main">
+              <a:ext uri="{FF2B5EF4-FFF2-40B4-BE49-F238E27FC236}">
+                <a16:creationId xmlns:a16="http://schemas.microsoft.com/office/drawing/2014/main" id="{2EDAB000-5A35-46FF-A889-F65D174DFC3A}"/>
+              </a:ext>
+            </a:extLst>
+          </p:cNvPr>
+          <p:cNvSpPr>
+            <a:spLocks xmlns:a="http://schemas.openxmlformats.org/drawingml/2006/main" noGrp="1"/>
+          </p:cNvSpPr>
+          <p:nvPr/>
+        </p:nvSpPr>
+        <p:spPr>
+          <a:xfrm xmlns:a="http://schemas.openxmlformats.org/drawingml/2006/main">
+            <a:off x="1352550" y="2457450"/>
+            <a:ext cx="285750" cy="285750"/>
           </a:xfrm>
           <a:prstGeom xmlns:a="http://schemas.openxmlformats.org/drawingml/2006/main" prst="ellipse">
             <a:avLst/>
           </a:prstGeom>
           <a:solidFill xmlns:a="http://schemas.openxmlformats.org/drawingml/2006/main">
-            <a:srgbClr val="1677C8"/>
+            <a:srgbClr val="5E6977"/>
           </a:solidFill>
           <a:ln xmlns:a="http://schemas.openxmlformats.org/drawingml/2006/main" w="0">
             <a:noFill/>
+            <a:prstDash val="solid"/>
+          </a:ln>
+        </p:spPr>
+        <p:txBody>
+          <a:bodyPr xmlns:a="http://schemas.openxmlformats.org/drawingml/2006/main" lIns="0" tIns="0" rIns="0" bIns="0" anchor="ctr">
+            <a:normAutofit fontScale="100000"/>
+          </a:bodyPr>
+          <a:lstStyle xmlns:a="http://schemas.openxmlformats.org/drawingml/2006/main"/>
+          <a:p xmlns:a="http://schemas.openxmlformats.org/drawingml/2006/main">
+            <a:pPr algn="ctr">
+              <a:defRPr sz="1200" b="1">
+                <a:solidFill>
+                  <a:srgbClr val="FFFFFF"/>
+                </a:solidFill>
+                <a:latin typeface="Microsoft YaHei"/>
+                <a:ea typeface="Microsoft YaHei"/>
+                <a:cs typeface="Microsoft YaHei"/>
+              </a:defRPr>
+            </a:pPr>
+            <a:r>
+              <a:rPr sz="1200" b="1">
+                <a:solidFill>
+                  <a:srgbClr val="FFFFFF"/>
+                </a:solidFill>
+                <a:latin typeface="Microsoft YaHei"/>
+                <a:ea typeface="Microsoft YaHei"/>
+                <a:cs typeface="Microsoft YaHei"/>
+              </a:rPr>
+              <a:t>×</a:t>
+            </a:r>
+          </a:p>
+        </p:txBody>
+      </p:sp>
+      <p:sp>
+        <p:nvSpPr>
+          <p:cNvPr id="9" name="PPAGENT_QA|within=comparison-left-row-0|role=item-text">
+            <a:extLst xmlns:a="http://schemas.openxmlformats.org/drawingml/2006/main">
+              <a:ext uri="{FF2B5EF4-FFF2-40B4-BE49-F238E27FC236}">
+                <a16:creationId xmlns:a16="http://schemas.microsoft.com/office/drawing/2014/main" id="{0EB96DEA-CF17-4814-9EF2-09A07BAEBE1F}"/>
+              </a:ext>
+            </a:extLst>
+          </p:cNvPr>
+          <p:cNvSpPr>
+            <a:spLocks xmlns:a="http://schemas.openxmlformats.org/drawingml/2006/main" noGrp="1"/>
+          </p:cNvSpPr>
+          <p:nvPr/>
+        </p:nvSpPr>
+        <p:spPr>
+          <a:xfrm xmlns:a="http://schemas.openxmlformats.org/drawingml/2006/main">
+            <a:off x="1733550" y="2400300"/>
+            <a:ext cx="2724150" cy="400050"/>
+          </a:xfrm>
+          <a:prstGeom xmlns:a="http://schemas.openxmlformats.org/drawingml/2006/main" prst="rect">
+            <a:avLst/>
+          </a:prstGeom>
+          <a:noFill xmlns:a="http://schemas.openxmlformats.org/drawingml/2006/main"/>
+          <a:ln xmlns:a="http://schemas.openxmlformats.org/drawingml/2006/main" w="0">
+            <a:noFill/>
+            <a:prstDash val="solid"/>
+          </a:ln>
+        </p:spPr>
+        <p:txBody>
+          <a:bodyPr xmlns:a="http://schemas.openxmlformats.org/drawingml/2006/main" lIns="0" tIns="0" rIns="0" bIns="0" anchor="ctr">
+            <a:normAutofit fontScale="100000"/>
+          </a:bodyPr>
+          <a:lstStyle xmlns:a="http://schemas.openxmlformats.org/drawingml/2006/main"/>
+          <a:p xmlns:a="http://schemas.openxmlformats.org/drawingml/2006/main">
+            <a:pPr algn="ctr">
+              <a:defRPr sz="1350" b="0">
+                <a:solidFill>
+                  <a:srgbClr val="FFFFFF"/>
+                </a:solidFill>
+                <a:latin typeface="Microsoft YaHei"/>
+                <a:ea typeface="Microsoft YaHei"/>
+                <a:cs typeface="Microsoft YaHei"/>
+              </a:defRPr>
+            </a:pPr>
+            <a:r>
+              <a:rPr sz="1350" b="0">
+                <a:solidFill>
+                  <a:srgbClr val="FFFFFF"/>
+                </a:solidFill>
+                <a:latin typeface="Microsoft YaHei"/>
+                <a:ea typeface="Microsoft YaHei"/>
+                <a:cs typeface="Microsoft YaHei"/>
+              </a:rPr>
+              <a:t>结果难以复现</a:t>
+            </a:r>
+          </a:p>
+        </p:txBody>
+      </p:sp>
+      <p:sp>
+        <p:nvSpPr>
+          <p:cNvPr id="10" name="PPAGENT_QA|parent=comparison-left-row-1|domains=comparison-left-rows">
+            <a:extLst xmlns:a="http://schemas.openxmlformats.org/drawingml/2006/main">
+              <a:ext uri="{FF2B5EF4-FFF2-40B4-BE49-F238E27FC236}">
+                <a16:creationId xmlns:a16="http://schemas.microsoft.com/office/drawing/2014/main" id="{A954EC99-6577-4155-9C86-24BBC8A207B2}"/>
+              </a:ext>
+            </a:extLst>
+          </p:cNvPr>
+          <p:cNvSpPr>
+            <a:spLocks xmlns:a="http://schemas.openxmlformats.org/drawingml/2006/main" noGrp="1"/>
+          </p:cNvSpPr>
+          <p:nvPr/>
+        </p:nvSpPr>
+        <p:spPr>
+          <a:xfrm xmlns:a="http://schemas.openxmlformats.org/drawingml/2006/main">
+            <a:off x="1219200" y="3181350"/>
+            <a:ext cx="3467100" cy="514350"/>
+          </a:xfrm>
+          <a:prstGeom xmlns:a="http://schemas.openxmlformats.org/drawingml/2006/main" prst="roundRect">
+            <a:avLst>
+              <a:gd name="adj" fmla="val 50000"/>
+            </a:avLst>
+          </a:prstGeom>
+          <a:gradFill xmlns:a="http://schemas.openxmlformats.org/drawingml/2006/main">
+            <a:gsLst>
+              <a:gs pos="0">
+                <a:srgbClr val="7E8A9A"/>
+              </a:gs>
+              <a:gs pos="100000">
+                <a:srgbClr val="9BA6B4"/>
+              </a:gs>
+            </a:gsLst>
+            <a:lin ang="0"/>
+          </a:gradFill>
+          <a:ln xmlns:a="http://schemas.openxmlformats.org/drawingml/2006/main" w="9525">
+            <a:solidFill>
+              <a:srgbClr val="6B7684"/>
+            </a:solidFill>
+            <a:prstDash val="solid"/>
+          </a:ln>
+        </p:spPr>
+        <p:style>
+          <a:lnRef xmlns:a="http://schemas.openxmlformats.org/drawingml/2006/main" idx="0"/>
+          <a:fillRef xmlns:a="http://schemas.openxmlformats.org/drawingml/2006/main" idx="0"/>
+          <a:effectRef xmlns:a="http://schemas.openxmlformats.org/drawingml/2006/main" idx="6"/>
+          <a:fontRef xmlns:a="http://schemas.openxmlformats.org/drawingml/2006/main" idx="major"/>
+        </p:style>
+      </p:sp>
+      <p:sp>
+        <p:nvSpPr>
+          <p:cNvPr id="11" name="PPAGENT_QA|within=comparison-left-row-1|role=status-marker">
+            <a:extLst xmlns:a="http://schemas.openxmlformats.org/drawingml/2006/main">
+              <a:ext uri="{FF2B5EF4-FFF2-40B4-BE49-F238E27FC236}">
+                <a16:creationId xmlns:a16="http://schemas.microsoft.com/office/drawing/2014/main" id="{D148E10A-D897-408F-9BB3-62BF927421C3}"/>
+              </a:ext>
+            </a:extLst>
+          </p:cNvPr>
+          <p:cNvSpPr>
+            <a:spLocks xmlns:a="http://schemas.openxmlformats.org/drawingml/2006/main" noGrp="1"/>
+          </p:cNvSpPr>
+          <p:nvPr/>
+        </p:nvSpPr>
+        <p:spPr>
+          <a:xfrm xmlns:a="http://schemas.openxmlformats.org/drawingml/2006/main">
+            <a:off x="1352550" y="3295650"/>
+            <a:ext cx="285750" cy="285750"/>
+          </a:xfrm>
+          <a:prstGeom xmlns:a="http://schemas.openxmlformats.org/drawingml/2006/main" prst="ellipse">
+            <a:avLst/>
+          </a:prstGeom>
+          <a:solidFill xmlns:a="http://schemas.openxmlformats.org/drawingml/2006/main">
+            <a:srgbClr val="5E6977"/>
+          </a:solidFill>
+          <a:ln xmlns:a="http://schemas.openxmlformats.org/drawingml/2006/main" w="0">
+            <a:noFill/>
+            <a:prstDash val="solid"/>
+          </a:ln>
+        </p:spPr>
+        <p:txBody>
+          <a:bodyPr xmlns:a="http://schemas.openxmlformats.org/drawingml/2006/main" lIns="0" tIns="0" rIns="0" bIns="0" anchor="ctr">
+            <a:normAutofit fontScale="100000"/>
+          </a:bodyPr>
+          <a:lstStyle xmlns:a="http://schemas.openxmlformats.org/drawingml/2006/main"/>
+          <a:p xmlns:a="http://schemas.openxmlformats.org/drawingml/2006/main">
+            <a:pPr algn="ctr">
+              <a:defRPr sz="1200" b="1">
+                <a:solidFill>
+                  <a:srgbClr val="FFFFFF"/>
+                </a:solidFill>
+                <a:latin typeface="Microsoft YaHei"/>
+                <a:ea typeface="Microsoft YaHei"/>
+                <a:cs typeface="Microsoft YaHei"/>
+              </a:defRPr>
+            </a:pPr>
+            <a:r>
+              <a:rPr sz="1200" b="1">
+                <a:solidFill>
+                  <a:srgbClr val="FFFFFF"/>
+                </a:solidFill>
+                <a:latin typeface="Microsoft YaHei"/>
+                <a:ea typeface="Microsoft YaHei"/>
+                <a:cs typeface="Microsoft YaHei"/>
+              </a:rPr>
+              <a:t>×</a:t>
+            </a:r>
+          </a:p>
+        </p:txBody>
+      </p:sp>
+      <p:sp>
+        <p:nvSpPr>
+          <p:cNvPr id="12" name="PPAGENT_QA|within=comparison-left-row-1|role=item-text">
+            <a:extLst xmlns:a="http://schemas.openxmlformats.org/drawingml/2006/main">
+              <a:ext uri="{FF2B5EF4-FFF2-40B4-BE49-F238E27FC236}">
+                <a16:creationId xmlns:a16="http://schemas.microsoft.com/office/drawing/2014/main" id="{C19EA076-D96D-4347-BA8A-9F9C2499B0CE}"/>
+              </a:ext>
+            </a:extLst>
+          </p:cNvPr>
+          <p:cNvSpPr>
+            <a:spLocks xmlns:a="http://schemas.openxmlformats.org/drawingml/2006/main" noGrp="1"/>
+          </p:cNvSpPr>
+          <p:nvPr/>
+        </p:nvSpPr>
+        <p:spPr>
+          <a:xfrm xmlns:a="http://schemas.openxmlformats.org/drawingml/2006/main">
+            <a:off x="1733550" y="3238500"/>
+            <a:ext cx="2724150" cy="400050"/>
+          </a:xfrm>
+          <a:prstGeom xmlns:a="http://schemas.openxmlformats.org/drawingml/2006/main" prst="rect">
+            <a:avLst/>
+          </a:prstGeom>
+          <a:noFill xmlns:a="http://schemas.openxmlformats.org/drawingml/2006/main"/>
+          <a:ln xmlns:a="http://schemas.openxmlformats.org/drawingml/2006/main" w="0">
+            <a:noFill/>
+            <a:prstDash val="solid"/>
+          </a:ln>
+        </p:spPr>
+        <p:txBody>
+          <a:bodyPr xmlns:a="http://schemas.openxmlformats.org/drawingml/2006/main" lIns="0" tIns="0" rIns="0" bIns="0" anchor="ctr">
+            <a:normAutofit fontScale="100000"/>
+          </a:bodyPr>
+          <a:lstStyle xmlns:a="http://schemas.openxmlformats.org/drawingml/2006/main"/>
+          <a:p xmlns:a="http://schemas.openxmlformats.org/drawingml/2006/main">
+            <a:pPr algn="ctr">
+              <a:defRPr sz="1350" b="0">
+                <a:solidFill>
+                  <a:srgbClr val="FFFFFF"/>
+                </a:solidFill>
+                <a:latin typeface="Microsoft YaHei"/>
+                <a:ea typeface="Microsoft YaHei"/>
+                <a:cs typeface="Microsoft YaHei"/>
+              </a:defRPr>
+            </a:pPr>
+            <a:r>
+              <a:rPr sz="1350" b="0">
+                <a:solidFill>
+                  <a:srgbClr val="FFFFFF"/>
+                </a:solidFill>
+                <a:latin typeface="Microsoft YaHei"/>
+                <a:ea typeface="Microsoft YaHei"/>
+                <a:cs typeface="Microsoft YaHei"/>
+              </a:rPr>
+              <a:t>版式质量波动</a:t>
+            </a:r>
+          </a:p>
+        </p:txBody>
+      </p:sp>
+      <p:sp>
+        <p:nvSpPr>
+          <p:cNvPr id="13" name="PPAGENT_QA|parent=comparison-left-row-2|domains=comparison-left-rows">
+            <a:extLst xmlns:a="http://schemas.openxmlformats.org/drawingml/2006/main">
+              <a:ext uri="{FF2B5EF4-FFF2-40B4-BE49-F238E27FC236}">
+                <a16:creationId xmlns:a16="http://schemas.microsoft.com/office/drawing/2014/main" id="{6A380249-8DBC-4524-91C3-A0599CE86A07}"/>
+              </a:ext>
+            </a:extLst>
+          </p:cNvPr>
+          <p:cNvSpPr>
+            <a:spLocks xmlns:a="http://schemas.openxmlformats.org/drawingml/2006/main" noGrp="1"/>
+          </p:cNvSpPr>
+          <p:nvPr/>
+        </p:nvSpPr>
+        <p:spPr>
+          <a:xfrm xmlns:a="http://schemas.openxmlformats.org/drawingml/2006/main">
+            <a:off x="1219200" y="4019550"/>
+            <a:ext cx="3467100" cy="514350"/>
+          </a:xfrm>
+          <a:prstGeom xmlns:a="http://schemas.openxmlformats.org/drawingml/2006/main" prst="roundRect">
+            <a:avLst>
+              <a:gd name="adj" fmla="val 50000"/>
+            </a:avLst>
+          </a:prstGeom>
+          <a:gradFill xmlns:a="http://schemas.openxmlformats.org/drawingml/2006/main">
+            <a:gsLst>
+              <a:gs pos="0">
+                <a:srgbClr val="7E8A9A"/>
+              </a:gs>
+              <a:gs pos="100000">
+                <a:srgbClr val="9BA6B4"/>
+              </a:gs>
+            </a:gsLst>
+            <a:lin ang="0"/>
+          </a:gradFill>
+          <a:ln xmlns:a="http://schemas.openxmlformats.org/drawingml/2006/main" w="9525">
+            <a:solidFill>
+              <a:srgbClr val="6B7684"/>
+            </a:solidFill>
+            <a:prstDash val="solid"/>
+          </a:ln>
+        </p:spPr>
+        <p:style>
+          <a:lnRef xmlns:a="http://schemas.openxmlformats.org/drawingml/2006/main" idx="0"/>
+          <a:fillRef xmlns:a="http://schemas.openxmlformats.org/drawingml/2006/main" idx="0"/>
+          <a:effectRef xmlns:a="http://schemas.openxmlformats.org/drawingml/2006/main" idx="6"/>
+          <a:fontRef xmlns:a="http://schemas.openxmlformats.org/drawingml/2006/main" idx="major"/>
+        </p:style>
+      </p:sp>
+      <p:sp>
+        <p:nvSpPr>
+          <p:cNvPr id="14" name="PPAGENT_QA|within=comparison-left-row-2|role=status-marker">
+            <a:extLst xmlns:a="http://schemas.openxmlformats.org/drawingml/2006/main">
+              <a:ext uri="{FF2B5EF4-FFF2-40B4-BE49-F238E27FC236}">
+                <a16:creationId xmlns:a16="http://schemas.microsoft.com/office/drawing/2014/main" id="{80E66FF8-4FE1-4F9D-9668-356704C8C2B7}"/>
+              </a:ext>
+            </a:extLst>
+          </p:cNvPr>
+          <p:cNvSpPr>
+            <a:spLocks xmlns:a="http://schemas.openxmlformats.org/drawingml/2006/main" noGrp="1"/>
+          </p:cNvSpPr>
+          <p:nvPr/>
+        </p:nvSpPr>
+        <p:spPr>
+          <a:xfrm xmlns:a="http://schemas.openxmlformats.org/drawingml/2006/main">
+            <a:off x="1352550" y="4133850"/>
+            <a:ext cx="285750" cy="285750"/>
+          </a:xfrm>
+          <a:prstGeom xmlns:a="http://schemas.openxmlformats.org/drawingml/2006/main" prst="ellipse">
+            <a:avLst/>
+          </a:prstGeom>
+          <a:solidFill xmlns:a="http://schemas.openxmlformats.org/drawingml/2006/main">
+            <a:srgbClr val="5E6977"/>
+          </a:solidFill>
+          <a:ln xmlns:a="http://schemas.openxmlformats.org/drawingml/2006/main" w="0">
+            <a:noFill/>
+            <a:prstDash val="solid"/>
+          </a:ln>
+        </p:spPr>
+        <p:txBody>
+          <a:bodyPr xmlns:a="http://schemas.openxmlformats.org/drawingml/2006/main" lIns="0" tIns="0" rIns="0" bIns="0" anchor="ctr">
+            <a:normAutofit fontScale="100000"/>
+          </a:bodyPr>
+          <a:lstStyle xmlns:a="http://schemas.openxmlformats.org/drawingml/2006/main"/>
+          <a:p xmlns:a="http://schemas.openxmlformats.org/drawingml/2006/main">
+            <a:pPr algn="ctr">
+              <a:defRPr sz="1200" b="1">
+                <a:solidFill>
+                  <a:srgbClr val="FFFFFF"/>
+                </a:solidFill>
+                <a:latin typeface="Microsoft YaHei"/>
+                <a:ea typeface="Microsoft YaHei"/>
+                <a:cs typeface="Microsoft YaHei"/>
+              </a:defRPr>
+            </a:pPr>
+            <a:r>
+              <a:rPr sz="1200" b="1">
+                <a:solidFill>
+                  <a:srgbClr val="FFFFFF"/>
+                </a:solidFill>
+                <a:latin typeface="Microsoft YaHei"/>
+                <a:ea typeface="Microsoft YaHei"/>
+                <a:cs typeface="Microsoft YaHei"/>
+              </a:rPr>
+              <a:t>×</a:t>
+            </a:r>
+          </a:p>
+        </p:txBody>
+      </p:sp>
+      <p:sp>
+        <p:nvSpPr>
+          <p:cNvPr id="15" name="PPAGENT_QA|within=comparison-left-row-2|role=item-text">
+            <a:extLst xmlns:a="http://schemas.openxmlformats.org/drawingml/2006/main">
+              <a:ext uri="{FF2B5EF4-FFF2-40B4-BE49-F238E27FC236}">
+                <a16:creationId xmlns:a16="http://schemas.microsoft.com/office/drawing/2014/main" id="{ECFF8077-2F33-4B2F-BF04-7F697F44CD44}"/>
+              </a:ext>
+            </a:extLst>
+          </p:cNvPr>
+          <p:cNvSpPr>
+            <a:spLocks xmlns:a="http://schemas.openxmlformats.org/drawingml/2006/main" noGrp="1"/>
+          </p:cNvSpPr>
+          <p:nvPr/>
+        </p:nvSpPr>
+        <p:spPr>
+          <a:xfrm xmlns:a="http://schemas.openxmlformats.org/drawingml/2006/main">
+            <a:off x="1733550" y="4076700"/>
+            <a:ext cx="2724150" cy="400050"/>
+          </a:xfrm>
+          <a:prstGeom xmlns:a="http://schemas.openxmlformats.org/drawingml/2006/main" prst="rect">
+            <a:avLst/>
+          </a:prstGeom>
+          <a:noFill xmlns:a="http://schemas.openxmlformats.org/drawingml/2006/main"/>
+          <a:ln xmlns:a="http://schemas.openxmlformats.org/drawingml/2006/main" w="0">
+            <a:noFill/>
+            <a:prstDash val="solid"/>
+          </a:ln>
+        </p:spPr>
+        <p:txBody>
+          <a:bodyPr xmlns:a="http://schemas.openxmlformats.org/drawingml/2006/main" lIns="0" tIns="0" rIns="0" bIns="0" anchor="ctr">
+            <a:normAutofit fontScale="100000"/>
+          </a:bodyPr>
+          <a:lstStyle xmlns:a="http://schemas.openxmlformats.org/drawingml/2006/main"/>
+          <a:p xmlns:a="http://schemas.openxmlformats.org/drawingml/2006/main">
+            <a:pPr algn="ctr">
+              <a:defRPr sz="1350" b="0">
+                <a:solidFill>
+                  <a:srgbClr val="FFFFFF"/>
+                </a:solidFill>
+                <a:latin typeface="Microsoft YaHei"/>
+                <a:ea typeface="Microsoft YaHei"/>
+                <a:cs typeface="Microsoft YaHei"/>
+              </a:defRPr>
+            </a:pPr>
+            <a:r>
+              <a:rPr sz="1350" b="0">
+                <a:solidFill>
+                  <a:srgbClr val="FFFFFF"/>
+                </a:solidFill>
+                <a:latin typeface="Microsoft YaHei"/>
+                <a:ea typeface="Microsoft YaHei"/>
+                <a:cs typeface="Microsoft YaHei"/>
+              </a:rPr>
+              <a:t>反复消耗判断</a:t>
+            </a:r>
+          </a:p>
+        </p:txBody>
+      </p:sp>
+      <p:sp>
+        <p:nvSpPr>
+          <p:cNvPr id="16" name="PPAGENT_QA|parent=comparison-left-row-3|domains=comparison-left-rows">
+            <a:extLst xmlns:a="http://schemas.openxmlformats.org/drawingml/2006/main">
+              <a:ext uri="{FF2B5EF4-FFF2-40B4-BE49-F238E27FC236}">
+                <a16:creationId xmlns:a16="http://schemas.microsoft.com/office/drawing/2014/main" id="{FF06B58C-F746-4470-8A59-94D97AAFFA8F}"/>
+              </a:ext>
+            </a:extLst>
+          </p:cNvPr>
+          <p:cNvSpPr>
+            <a:spLocks xmlns:a="http://schemas.openxmlformats.org/drawingml/2006/main" noGrp="1"/>
+          </p:cNvSpPr>
+          <p:nvPr/>
+        </p:nvSpPr>
+        <p:spPr>
+          <a:xfrm xmlns:a="http://schemas.openxmlformats.org/drawingml/2006/main">
+            <a:off x="1219200" y="4857750"/>
+            <a:ext cx="3467100" cy="514350"/>
+          </a:xfrm>
+          <a:prstGeom xmlns:a="http://schemas.openxmlformats.org/drawingml/2006/main" prst="roundRect">
+            <a:avLst>
+              <a:gd name="adj" fmla="val 50000"/>
+            </a:avLst>
+          </a:prstGeom>
+          <a:gradFill xmlns:a="http://schemas.openxmlformats.org/drawingml/2006/main">
+            <a:gsLst>
+              <a:gs pos="0">
+                <a:srgbClr val="7E8A9A"/>
+              </a:gs>
+              <a:gs pos="100000">
+                <a:srgbClr val="9BA6B4"/>
+              </a:gs>
+            </a:gsLst>
+            <a:lin ang="0"/>
+          </a:gradFill>
+          <a:ln xmlns:a="http://schemas.openxmlformats.org/drawingml/2006/main" w="9525">
+            <a:solidFill>
+              <a:srgbClr val="6B7684"/>
+            </a:solidFill>
+            <a:prstDash val="solid"/>
+          </a:ln>
+        </p:spPr>
+        <p:style>
+          <a:lnRef xmlns:a="http://schemas.openxmlformats.org/drawingml/2006/main" idx="0"/>
+          <a:fillRef xmlns:a="http://schemas.openxmlformats.org/drawingml/2006/main" idx="0"/>
+          <a:effectRef xmlns:a="http://schemas.openxmlformats.org/drawingml/2006/main" idx="6"/>
+          <a:fontRef xmlns:a="http://schemas.openxmlformats.org/drawingml/2006/main" idx="major"/>
+        </p:style>
+      </p:sp>
+      <p:sp>
+        <p:nvSpPr>
+          <p:cNvPr id="17" name="PPAGENT_QA|within=comparison-left-row-3|role=status-marker">
+            <a:extLst xmlns:a="http://schemas.openxmlformats.org/drawingml/2006/main">
+              <a:ext uri="{FF2B5EF4-FFF2-40B4-BE49-F238E27FC236}">
+                <a16:creationId xmlns:a16="http://schemas.microsoft.com/office/drawing/2014/main" id="{3D2F130A-4D9B-4DA2-B4B1-E568348453AA}"/>
+              </a:ext>
+            </a:extLst>
+          </p:cNvPr>
+          <p:cNvSpPr>
+            <a:spLocks xmlns:a="http://schemas.openxmlformats.org/drawingml/2006/main" noGrp="1"/>
+          </p:cNvSpPr>
+          <p:nvPr/>
+        </p:nvSpPr>
+        <p:spPr>
+          <a:xfrm xmlns:a="http://schemas.openxmlformats.org/drawingml/2006/main">
+            <a:off x="1352550" y="4972050"/>
+            <a:ext cx="285750" cy="285750"/>
+          </a:xfrm>
+          <a:prstGeom xmlns:a="http://schemas.openxmlformats.org/drawingml/2006/main" prst="ellipse">
+            <a:avLst/>
+          </a:prstGeom>
+          <a:solidFill xmlns:a="http://schemas.openxmlformats.org/drawingml/2006/main">
+            <a:srgbClr val="5E6977"/>
+          </a:solidFill>
+          <a:ln xmlns:a="http://schemas.openxmlformats.org/drawingml/2006/main" w="0">
+            <a:noFill/>
+            <a:prstDash val="solid"/>
+          </a:ln>
+        </p:spPr>
+        <p:txBody>
+          <a:bodyPr xmlns:a="http://schemas.openxmlformats.org/drawingml/2006/main" lIns="0" tIns="0" rIns="0" bIns="0" anchor="ctr">
+            <a:normAutofit fontScale="100000"/>
+          </a:bodyPr>
+          <a:lstStyle xmlns:a="http://schemas.openxmlformats.org/drawingml/2006/main"/>
+          <a:p xmlns:a="http://schemas.openxmlformats.org/drawingml/2006/main">
+            <a:pPr algn="ctr">
+              <a:defRPr sz="1200" b="1">
+                <a:solidFill>
+                  <a:srgbClr val="FFFFFF"/>
+                </a:solidFill>
+                <a:latin typeface="Microsoft YaHei"/>
+                <a:ea typeface="Microsoft YaHei"/>
+                <a:cs typeface="Microsoft YaHei"/>
+              </a:defRPr>
+            </a:pPr>
+            <a:r>
+              <a:rPr sz="1200" b="1">
+                <a:solidFill>
+                  <a:srgbClr val="FFFFFF"/>
+                </a:solidFill>
+                <a:latin typeface="Microsoft YaHei"/>
+                <a:ea typeface="Microsoft YaHei"/>
+                <a:cs typeface="Microsoft YaHei"/>
+              </a:rPr>
+              <a:t>×</a:t>
+            </a:r>
+          </a:p>
+        </p:txBody>
+      </p:sp>
+      <p:sp>
+        <p:nvSpPr>
+          <p:cNvPr id="18" name="PPAGENT_QA|within=comparison-left-row-3|role=item-text">
+            <a:extLst xmlns:a="http://schemas.openxmlformats.org/drawingml/2006/main">
+              <a:ext uri="{FF2B5EF4-FFF2-40B4-BE49-F238E27FC236}">
+                <a16:creationId xmlns:a16="http://schemas.microsoft.com/office/drawing/2014/main" id="{5EFFB02C-067D-4250-987F-34195C8DF14D}"/>
+              </a:ext>
+            </a:extLst>
+          </p:cNvPr>
+          <p:cNvSpPr>
+            <a:spLocks xmlns:a="http://schemas.openxmlformats.org/drawingml/2006/main" noGrp="1"/>
+          </p:cNvSpPr>
+          <p:nvPr/>
+        </p:nvSpPr>
+        <p:spPr>
+          <a:xfrm xmlns:a="http://schemas.openxmlformats.org/drawingml/2006/main">
+            <a:off x="1733550" y="4914900"/>
+            <a:ext cx="2724150" cy="400050"/>
+          </a:xfrm>
+          <a:prstGeom xmlns:a="http://schemas.openxmlformats.org/drawingml/2006/main" prst="rect">
+            <a:avLst/>
+          </a:prstGeom>
+          <a:noFill xmlns:a="http://schemas.openxmlformats.org/drawingml/2006/main"/>
+          <a:ln xmlns:a="http://schemas.openxmlformats.org/drawingml/2006/main" w="0">
+            <a:noFill/>
+            <a:prstDash val="solid"/>
+          </a:ln>
+        </p:spPr>
+        <p:txBody>
+          <a:bodyPr xmlns:a="http://schemas.openxmlformats.org/drawingml/2006/main" lIns="0" tIns="0" rIns="0" bIns="0" anchor="ctr">
+            <a:normAutofit fontScale="100000"/>
+          </a:bodyPr>
+          <a:lstStyle xmlns:a="http://schemas.openxmlformats.org/drawingml/2006/main"/>
+          <a:p xmlns:a="http://schemas.openxmlformats.org/drawingml/2006/main">
+            <a:pPr algn="ctr">
+              <a:defRPr sz="1350" b="0">
+                <a:solidFill>
+                  <a:srgbClr val="FFFFFF"/>
+                </a:solidFill>
+                <a:latin typeface="Microsoft YaHei"/>
+                <a:ea typeface="Microsoft YaHei"/>
+                <a:cs typeface="Microsoft YaHei"/>
+              </a:defRPr>
+            </a:pPr>
+            <a:r>
+              <a:rPr sz="1350" b="0">
+                <a:solidFill>
+                  <a:srgbClr val="FFFFFF"/>
+                </a:solidFill>
+                <a:latin typeface="Microsoft YaHei"/>
+                <a:ea typeface="Microsoft YaHei"/>
+                <a:cs typeface="Microsoft YaHei"/>
+              </a:rPr>
+              <a:t>经验难以沉淀</a:t>
+            </a:r>
+          </a:p>
+        </p:txBody>
+      </p:sp>
+      <p:sp>
+        <p:nvSpPr>
+          <p:cNvPr id="19" name="PPAGENT_QA|parent=comparison-right-panel|domains=comparison-panels">
+            <a:extLst xmlns:a="http://schemas.openxmlformats.org/drawingml/2006/main">
+              <a:ext uri="{FF2B5EF4-FFF2-40B4-BE49-F238E27FC236}">
+                <a16:creationId xmlns:a16="http://schemas.microsoft.com/office/drawing/2014/main" id="{4F2316D0-5489-49A7-A517-301DFEE0F598}"/>
+              </a:ext>
+            </a:extLst>
+          </p:cNvPr>
+          <p:cNvSpPr>
+            <a:spLocks xmlns:a="http://schemas.openxmlformats.org/drawingml/2006/main" noGrp="1"/>
+          </p:cNvSpPr>
+          <p:nvPr/>
+        </p:nvSpPr>
+        <p:spPr>
+          <a:xfrm xmlns:a="http://schemas.openxmlformats.org/drawingml/2006/main">
+            <a:off x="7143750" y="1485900"/>
+            <a:ext cx="4191000" cy="4400550"/>
+          </a:xfrm>
+          <a:prstGeom xmlns:a="http://schemas.openxmlformats.org/drawingml/2006/main" prst="roundRect">
+            <a:avLst>
+              <a:gd name="adj" fmla="val 2727"/>
+            </a:avLst>
+          </a:prstGeom>
+          <a:solidFill xmlns:a="http://schemas.openxmlformats.org/drawingml/2006/main">
+            <a:srgbClr val="FFFFFF">
+              <a:alpha val="96000"/>
+            </a:srgbClr>
+          </a:solidFill>
+          <a:ln xmlns:a="http://schemas.openxmlformats.org/drawingml/2006/main" w="14288">
+            <a:solidFill>
+              <a:srgbClr val="A7B4C4"/>
+            </a:solidFill>
+            <a:prstDash val="dash"/>
+          </a:ln>
+        </p:spPr>
+        <p:style>
+          <a:lnRef xmlns:a="http://schemas.openxmlformats.org/drawingml/2006/main" idx="0"/>
+          <a:fillRef xmlns:a="http://schemas.openxmlformats.org/drawingml/2006/main" idx="0"/>
+          <a:effectRef xmlns:a="http://schemas.openxmlformats.org/drawingml/2006/main" idx="6"/>
+          <a:fontRef xmlns:a="http://schemas.openxmlformats.org/drawingml/2006/main" idx="major"/>
+        </p:style>
+      </p:sp>
+      <p:sp>
+        <p:nvSpPr>
+          <p:cNvPr id="20" name="PPAGENT_QA|within=comparison-right-panel|role=header-surface">
+            <a:extLst xmlns:a="http://schemas.openxmlformats.org/drawingml/2006/main">
+              <a:ext uri="{FF2B5EF4-FFF2-40B4-BE49-F238E27FC236}">
+                <a16:creationId xmlns:a16="http://schemas.microsoft.com/office/drawing/2014/main" id="{4CBC2264-74F4-4F09-B796-F6EF15C546DD}"/>
+              </a:ext>
+            </a:extLst>
+          </p:cNvPr>
+          <p:cNvSpPr>
+            <a:spLocks xmlns:a="http://schemas.openxmlformats.org/drawingml/2006/main" noGrp="1"/>
+          </p:cNvSpPr>
+          <p:nvPr/>
+        </p:nvSpPr>
+        <p:spPr>
+          <a:xfrm xmlns:a="http://schemas.openxmlformats.org/drawingml/2006/main">
+            <a:off x="7143750" y="1485900"/>
+            <a:ext cx="4191000" cy="685800"/>
+          </a:xfrm>
+          <a:prstGeom xmlns:a="http://schemas.openxmlformats.org/drawingml/2006/main" prst="roundRect">
+            <a:avLst>
+              <a:gd name="adj" fmla="val 16667"/>
+            </a:avLst>
+          </a:prstGeom>
+          <a:gradFill xmlns:a="http://schemas.openxmlformats.org/drawingml/2006/main">
+            <a:gsLst>
+              <a:gs pos="0">
+                <a:srgbClr val="00A8D8"/>
+              </a:gs>
+              <a:gs pos="100000">
+                <a:srgbClr val="379BEF"/>
+              </a:gs>
+            </a:gsLst>
+            <a:lin ang="0"/>
+          </a:gradFill>
+          <a:ln xmlns:a="http://schemas.openxmlformats.org/drawingml/2006/main" w="0">
+            <a:noFill/>
+            <a:prstDash val="solid"/>
+          </a:ln>
+        </p:spPr>
+        <p:style>
+          <a:lnRef xmlns:a="http://schemas.openxmlformats.org/drawingml/2006/main" idx="0"/>
+          <a:fillRef xmlns:a="http://schemas.openxmlformats.org/drawingml/2006/main" idx="0"/>
+          <a:effectRef xmlns:a="http://schemas.openxmlformats.org/drawingml/2006/main" idx="6"/>
+          <a:fontRef xmlns:a="http://schemas.openxmlformats.org/drawingml/2006/main" idx="major"/>
+        </p:style>
+      </p:sp>
+      <p:sp>
+        <p:nvSpPr>
+          <p:cNvPr id="21" name="PPAGENT_QA|within=comparison-right-panel|role=header-title">
+            <a:extLst xmlns:a="http://schemas.openxmlformats.org/drawingml/2006/main">
+              <a:ext uri="{FF2B5EF4-FFF2-40B4-BE49-F238E27FC236}">
+                <a16:creationId xmlns:a16="http://schemas.microsoft.com/office/drawing/2014/main" id="{970887C4-5AEE-4D64-B302-2281329336C1}"/>
+              </a:ext>
+            </a:extLst>
+          </p:cNvPr>
+          <p:cNvSpPr>
+            <a:spLocks xmlns:a="http://schemas.openxmlformats.org/drawingml/2006/main" noGrp="1"/>
+          </p:cNvSpPr>
+          <p:nvPr/>
+        </p:nvSpPr>
+        <p:spPr>
+          <a:xfrm xmlns:a="http://schemas.openxmlformats.org/drawingml/2006/main">
+            <a:off x="7467600" y="1581150"/>
+            <a:ext cx="3543300" cy="495300"/>
+          </a:xfrm>
+          <a:prstGeom xmlns:a="http://schemas.openxmlformats.org/drawingml/2006/main" prst="rect">
+            <a:avLst/>
+          </a:prstGeom>
+          <a:noFill xmlns:a="http://schemas.openxmlformats.org/drawingml/2006/main"/>
+          <a:ln xmlns:a="http://schemas.openxmlformats.org/drawingml/2006/main" w="0">
+            <a:noFill/>
+            <a:prstDash val="solid"/>
+          </a:ln>
+        </p:spPr>
+        <p:txBody>
+          <a:bodyPr xmlns:a="http://schemas.openxmlformats.org/drawingml/2006/main" lIns="0" tIns="0" rIns="0" bIns="0" anchor="ctr">
+            <a:normAutofit fontScale="100000"/>
+          </a:bodyPr>
+          <a:lstStyle xmlns:a="http://schemas.openxmlformats.org/drawingml/2006/main"/>
+          <a:p xmlns:a="http://schemas.openxmlformats.org/drawingml/2006/main">
+            <a:pPr algn="ctr">
+              <a:defRPr sz="1800" b="1">
+                <a:solidFill>
+                  <a:srgbClr val="FFFFFF"/>
+                </a:solidFill>
+                <a:latin typeface="Microsoft YaHei"/>
+                <a:ea typeface="Microsoft YaHei"/>
+                <a:cs typeface="Microsoft YaHei"/>
+              </a:defRPr>
+            </a:pPr>
+            <a:r>
+              <a:rPr sz="1800" b="1">
+                <a:solidFill>
+                  <a:srgbClr val="FFFFFF"/>
+                </a:solidFill>
+                <a:latin typeface="Microsoft YaHei"/>
+                <a:ea typeface="Microsoft YaHei"/>
+                <a:cs typeface="Microsoft YaHei"/>
+              </a:rPr>
+              <a:t>受控生成</a:t>
+            </a:r>
+          </a:p>
+        </p:txBody>
+      </p:sp>
+      <p:sp>
+        <p:nvSpPr>
+          <p:cNvPr id="22" name="PPAGENT_QA|parent=comparison-right-row-0|domains=comparison-right-rows">
+            <a:extLst xmlns:a="http://schemas.openxmlformats.org/drawingml/2006/main">
+              <a:ext uri="{FF2B5EF4-FFF2-40B4-BE49-F238E27FC236}">
+                <a16:creationId xmlns:a16="http://schemas.microsoft.com/office/drawing/2014/main" id="{E68A79BC-00BF-4BA4-8DCB-C953405D19AD}"/>
+              </a:ext>
+            </a:extLst>
+          </p:cNvPr>
+          <p:cNvSpPr>
+            <a:spLocks xmlns:a="http://schemas.openxmlformats.org/drawingml/2006/main" noGrp="1"/>
+          </p:cNvSpPr>
+          <p:nvPr/>
+        </p:nvSpPr>
+        <p:spPr>
+          <a:xfrm xmlns:a="http://schemas.openxmlformats.org/drawingml/2006/main">
+            <a:off x="7505700" y="2343150"/>
+            <a:ext cx="3467100" cy="514350"/>
+          </a:xfrm>
+          <a:prstGeom xmlns:a="http://schemas.openxmlformats.org/drawingml/2006/main" prst="roundRect">
+            <a:avLst>
+              <a:gd name="adj" fmla="val 50000"/>
+            </a:avLst>
+          </a:prstGeom>
+          <a:gradFill xmlns:a="http://schemas.openxmlformats.org/drawingml/2006/main">
+            <a:gsLst>
+              <a:gs pos="0">
+                <a:srgbClr val="00A8D8"/>
+              </a:gs>
+              <a:gs pos="100000">
+                <a:srgbClr val="379BEF"/>
+              </a:gs>
+            </a:gsLst>
+            <a:lin ang="0"/>
+          </a:gradFill>
+          <a:ln xmlns:a="http://schemas.openxmlformats.org/drawingml/2006/main" w="9525">
+            <a:solidFill>
+              <a:srgbClr val="14CBD1"/>
+            </a:solidFill>
+            <a:prstDash val="solid"/>
+          </a:ln>
+        </p:spPr>
+        <p:style>
+          <a:lnRef xmlns:a="http://schemas.openxmlformats.org/drawingml/2006/main" idx="0"/>
+          <a:fillRef xmlns:a="http://schemas.openxmlformats.org/drawingml/2006/main" idx="0"/>
+          <a:effectRef xmlns:a="http://schemas.openxmlformats.org/drawingml/2006/main" idx="6"/>
+          <a:fontRef xmlns:a="http://schemas.openxmlformats.org/drawingml/2006/main" idx="major"/>
+        </p:style>
+      </p:sp>
+      <p:sp>
+        <p:nvSpPr>
+          <p:cNvPr id="23" name="PPAGENT_QA|within=comparison-right-row-0|role=status-marker">
+            <a:extLst xmlns:a="http://schemas.openxmlformats.org/drawingml/2006/main">
+              <a:ext uri="{FF2B5EF4-FFF2-40B4-BE49-F238E27FC236}">
+                <a16:creationId xmlns:a16="http://schemas.microsoft.com/office/drawing/2014/main" id="{CED0FF5F-28DC-496A-BF3F-7A4C65487BF8}"/>
+              </a:ext>
+            </a:extLst>
+          </p:cNvPr>
+          <p:cNvSpPr>
+            <a:spLocks xmlns:a="http://schemas.openxmlformats.org/drawingml/2006/main" noGrp="1"/>
+          </p:cNvSpPr>
+          <p:nvPr/>
+        </p:nvSpPr>
+        <p:spPr>
+          <a:xfrm xmlns:a="http://schemas.openxmlformats.org/drawingml/2006/main">
+            <a:off x="7639050" y="2457450"/>
+            <a:ext cx="285750" cy="285750"/>
+          </a:xfrm>
+          <a:prstGeom xmlns:a="http://schemas.openxmlformats.org/drawingml/2006/main" prst="ellipse">
+            <a:avLst/>
+          </a:prstGeom>
+          <a:solidFill xmlns:a="http://schemas.openxmlformats.org/drawingml/2006/main">
+            <a:srgbClr val="00A8D8"/>
+          </a:solidFill>
+          <a:ln xmlns:a="http://schemas.openxmlformats.org/drawingml/2006/main" w="0">
+            <a:noFill/>
+            <a:prstDash val="solid"/>
+          </a:ln>
+        </p:spPr>
+        <p:txBody>
+          <a:bodyPr xmlns:a="http://schemas.openxmlformats.org/drawingml/2006/main" lIns="0" tIns="0" rIns="0" bIns="0" anchor="ctr">
+            <a:normAutofit fontScale="100000"/>
+          </a:bodyPr>
+          <a:lstStyle xmlns:a="http://schemas.openxmlformats.org/drawingml/2006/main"/>
+          <a:p xmlns:a="http://schemas.openxmlformats.org/drawingml/2006/main">
+            <a:pPr algn="ctr">
+              <a:defRPr sz="1200" b="1">
+                <a:solidFill>
+                  <a:srgbClr val="FFFFFF"/>
+                </a:solidFill>
+                <a:latin typeface="Microsoft YaHei"/>
+                <a:ea typeface="Microsoft YaHei"/>
+                <a:cs typeface="Microsoft YaHei"/>
+              </a:defRPr>
+            </a:pPr>
+            <a:r>
+              <a:rPr sz="1200" b="1">
+                <a:solidFill>
+                  <a:srgbClr val="FFFFFF"/>
+                </a:solidFill>
+                <a:latin typeface="Microsoft YaHei"/>
+                <a:ea typeface="Microsoft YaHei"/>
+                <a:cs typeface="Microsoft YaHei"/>
+              </a:rPr>
+              <a:t>✓</a:t>
+            </a:r>
+          </a:p>
+        </p:txBody>
+      </p:sp>
+      <p:sp>
+        <p:nvSpPr>
+          <p:cNvPr id="24" name="PPAGENT_QA|within=comparison-right-row-0|role=item-text">
+            <a:extLst xmlns:a="http://schemas.openxmlformats.org/drawingml/2006/main">
+              <a:ext uri="{FF2B5EF4-FFF2-40B4-BE49-F238E27FC236}">
+                <a16:creationId xmlns:a16="http://schemas.microsoft.com/office/drawing/2014/main" id="{886642A6-909C-4143-9D10-64BAC002223C}"/>
+              </a:ext>
+            </a:extLst>
+          </p:cNvPr>
+          <p:cNvSpPr>
+            <a:spLocks xmlns:a="http://schemas.openxmlformats.org/drawingml/2006/main" noGrp="1"/>
+          </p:cNvSpPr>
+          <p:nvPr/>
+        </p:nvSpPr>
+        <p:spPr>
+          <a:xfrm xmlns:a="http://schemas.openxmlformats.org/drawingml/2006/main">
+            <a:off x="8020050" y="2400300"/>
+            <a:ext cx="2724150" cy="400050"/>
+          </a:xfrm>
+          <a:prstGeom xmlns:a="http://schemas.openxmlformats.org/drawingml/2006/main" prst="rect">
+            <a:avLst/>
+          </a:prstGeom>
+          <a:noFill xmlns:a="http://schemas.openxmlformats.org/drawingml/2006/main"/>
+          <a:ln xmlns:a="http://schemas.openxmlformats.org/drawingml/2006/main" w="0">
+            <a:noFill/>
+            <a:prstDash val="solid"/>
+          </a:ln>
+        </p:spPr>
+        <p:txBody>
+          <a:bodyPr xmlns:a="http://schemas.openxmlformats.org/drawingml/2006/main" lIns="0" tIns="0" rIns="0" bIns="0" anchor="ctr">
+            <a:normAutofit fontScale="100000"/>
+          </a:bodyPr>
+          <a:lstStyle xmlns:a="http://schemas.openxmlformats.org/drawingml/2006/main"/>
+          <a:p xmlns:a="http://schemas.openxmlformats.org/drawingml/2006/main">
+            <a:pPr algn="ctr">
+              <a:defRPr sz="1350" b="0">
+                <a:solidFill>
+                  <a:srgbClr val="FFFFFF"/>
+                </a:solidFill>
+                <a:latin typeface="Microsoft YaHei"/>
+                <a:ea typeface="Microsoft YaHei"/>
+                <a:cs typeface="Microsoft YaHei"/>
+              </a:defRPr>
+            </a:pPr>
+            <a:r>
+              <a:rPr sz="1350" b="0">
+                <a:solidFill>
+                  <a:srgbClr val="FFFFFF"/>
+                </a:solidFill>
+                <a:latin typeface="Microsoft YaHei"/>
+                <a:ea typeface="Microsoft YaHei"/>
+                <a:cs typeface="Microsoft YaHei"/>
+              </a:rPr>
+              <a:t>输出稳定可靠</a:t>
+            </a:r>
+          </a:p>
+        </p:txBody>
+      </p:sp>
+      <p:sp>
+        <p:nvSpPr>
+          <p:cNvPr id="25" name="PPAGENT_QA|parent=comparison-right-row-1|domains=comparison-right-rows">
+            <a:extLst xmlns:a="http://schemas.openxmlformats.org/drawingml/2006/main">
+              <a:ext uri="{FF2B5EF4-FFF2-40B4-BE49-F238E27FC236}">
+                <a16:creationId xmlns:a16="http://schemas.microsoft.com/office/drawing/2014/main" id="{88B44F4B-3A04-4A96-ABCC-BDE202CEE2EE}"/>
+              </a:ext>
+            </a:extLst>
+          </p:cNvPr>
+          <p:cNvSpPr>
+            <a:spLocks xmlns:a="http://schemas.openxmlformats.org/drawingml/2006/main" noGrp="1"/>
+          </p:cNvSpPr>
+          <p:nvPr/>
+        </p:nvSpPr>
+        <p:spPr>
+          <a:xfrm xmlns:a="http://schemas.openxmlformats.org/drawingml/2006/main">
+            <a:off x="7505700" y="3181350"/>
+            <a:ext cx="3467100" cy="514350"/>
+          </a:xfrm>
+          <a:prstGeom xmlns:a="http://schemas.openxmlformats.org/drawingml/2006/main" prst="roundRect">
+            <a:avLst>
+              <a:gd name="adj" fmla="val 50000"/>
+            </a:avLst>
+          </a:prstGeom>
+          <a:gradFill xmlns:a="http://schemas.openxmlformats.org/drawingml/2006/main">
+            <a:gsLst>
+              <a:gs pos="0">
+                <a:srgbClr val="00A8D8"/>
+              </a:gs>
+              <a:gs pos="100000">
+                <a:srgbClr val="379BEF"/>
+              </a:gs>
+            </a:gsLst>
+            <a:lin ang="0"/>
+          </a:gradFill>
+          <a:ln xmlns:a="http://schemas.openxmlformats.org/drawingml/2006/main" w="9525">
+            <a:solidFill>
+              <a:srgbClr val="14CBD1"/>
+            </a:solidFill>
+            <a:prstDash val="solid"/>
+          </a:ln>
+        </p:spPr>
+        <p:style>
+          <a:lnRef xmlns:a="http://schemas.openxmlformats.org/drawingml/2006/main" idx="0"/>
+          <a:fillRef xmlns:a="http://schemas.openxmlformats.org/drawingml/2006/main" idx="0"/>
+          <a:effectRef xmlns:a="http://schemas.openxmlformats.org/drawingml/2006/main" idx="6"/>
+          <a:fontRef xmlns:a="http://schemas.openxmlformats.org/drawingml/2006/main" idx="major"/>
+        </p:style>
+      </p:sp>
+      <p:sp>
+        <p:nvSpPr>
+          <p:cNvPr id="26" name="PPAGENT_QA|within=comparison-right-row-1|role=status-marker">
+            <a:extLst xmlns:a="http://schemas.openxmlformats.org/drawingml/2006/main">
+              <a:ext uri="{FF2B5EF4-FFF2-40B4-BE49-F238E27FC236}">
+                <a16:creationId xmlns:a16="http://schemas.microsoft.com/office/drawing/2014/main" id="{5B1A3145-6238-4E74-84D5-124A24302FE1}"/>
+              </a:ext>
+            </a:extLst>
+          </p:cNvPr>
+          <p:cNvSpPr>
+            <a:spLocks xmlns:a="http://schemas.openxmlformats.org/drawingml/2006/main" noGrp="1"/>
+          </p:cNvSpPr>
+          <p:nvPr/>
+        </p:nvSpPr>
+        <p:spPr>
+          <a:xfrm xmlns:a="http://schemas.openxmlformats.org/drawingml/2006/main">
+            <a:off x="7639050" y="3295650"/>
+            <a:ext cx="285750" cy="285750"/>
+          </a:xfrm>
+          <a:prstGeom xmlns:a="http://schemas.openxmlformats.org/drawingml/2006/main" prst="ellipse">
+            <a:avLst/>
+          </a:prstGeom>
+          <a:solidFill xmlns:a="http://schemas.openxmlformats.org/drawingml/2006/main">
+            <a:srgbClr val="00A8D8"/>
+          </a:solidFill>
+          <a:ln xmlns:a="http://schemas.openxmlformats.org/drawingml/2006/main" w="0">
+            <a:noFill/>
+            <a:prstDash val="solid"/>
+          </a:ln>
+        </p:spPr>
+        <p:txBody>
+          <a:bodyPr xmlns:a="http://schemas.openxmlformats.org/drawingml/2006/main" lIns="0" tIns="0" rIns="0" bIns="0" anchor="ctr">
+            <a:normAutofit fontScale="100000"/>
+          </a:bodyPr>
+          <a:lstStyle xmlns:a="http://schemas.openxmlformats.org/drawingml/2006/main"/>
+          <a:p xmlns:a="http://schemas.openxmlformats.org/drawingml/2006/main">
+            <a:pPr algn="ctr">
+              <a:defRPr sz="1200" b="1">
+                <a:solidFill>
+                  <a:srgbClr val="FFFFFF"/>
+                </a:solidFill>
+                <a:latin typeface="Microsoft YaHei"/>
+                <a:ea typeface="Microsoft YaHei"/>
+                <a:cs typeface="Microsoft YaHei"/>
+              </a:defRPr>
+            </a:pPr>
+            <a:r>
+              <a:rPr sz="1200" b="1">
+                <a:solidFill>
+                  <a:srgbClr val="FFFFFF"/>
+                </a:solidFill>
+                <a:latin typeface="Microsoft YaHei"/>
+                <a:ea typeface="Microsoft YaHei"/>
+                <a:cs typeface="Microsoft YaHei"/>
+              </a:rPr>
+              <a:t>✓</a:t>
+            </a:r>
+          </a:p>
+        </p:txBody>
+      </p:sp>
+      <p:sp>
+        <p:nvSpPr>
+          <p:cNvPr id="27" name="PPAGENT_QA|within=comparison-right-row-1|role=item-text">
+            <a:extLst xmlns:a="http://schemas.openxmlformats.org/drawingml/2006/main">
+              <a:ext uri="{FF2B5EF4-FFF2-40B4-BE49-F238E27FC236}">
+                <a16:creationId xmlns:a16="http://schemas.microsoft.com/office/drawing/2014/main" id="{504B6BA2-4553-457F-BF40-921FE3E42E35}"/>
+              </a:ext>
+            </a:extLst>
+          </p:cNvPr>
+          <p:cNvSpPr>
+            <a:spLocks xmlns:a="http://schemas.openxmlformats.org/drawingml/2006/main" noGrp="1"/>
+          </p:cNvSpPr>
+          <p:nvPr/>
+        </p:nvSpPr>
+        <p:spPr>
+          <a:xfrm xmlns:a="http://schemas.openxmlformats.org/drawingml/2006/main">
+            <a:off x="8020050" y="3238500"/>
+            <a:ext cx="2724150" cy="400050"/>
+          </a:xfrm>
+          <a:prstGeom xmlns:a="http://schemas.openxmlformats.org/drawingml/2006/main" prst="rect">
+            <a:avLst/>
+          </a:prstGeom>
+          <a:noFill xmlns:a="http://schemas.openxmlformats.org/drawingml/2006/main"/>
+          <a:ln xmlns:a="http://schemas.openxmlformats.org/drawingml/2006/main" w="0">
+            <a:noFill/>
+            <a:prstDash val="solid"/>
+          </a:ln>
+        </p:spPr>
+        <p:txBody>
+          <a:bodyPr xmlns:a="http://schemas.openxmlformats.org/drawingml/2006/main" lIns="0" tIns="0" rIns="0" bIns="0" anchor="ctr">
+            <a:normAutofit fontScale="100000"/>
+          </a:bodyPr>
+          <a:lstStyle xmlns:a="http://schemas.openxmlformats.org/drawingml/2006/main"/>
+          <a:p xmlns:a="http://schemas.openxmlformats.org/drawingml/2006/main">
+            <a:pPr algn="ctr">
+              <a:defRPr sz="1350" b="0">
+                <a:solidFill>
+                  <a:srgbClr val="FFFFFF"/>
+                </a:solidFill>
+                <a:latin typeface="Microsoft YaHei"/>
+                <a:ea typeface="Microsoft YaHei"/>
+                <a:cs typeface="Microsoft YaHei"/>
+              </a:defRPr>
+            </a:pPr>
+            <a:r>
+              <a:rPr sz="1350" b="0">
+                <a:solidFill>
+                  <a:srgbClr val="FFFFFF"/>
+                </a:solidFill>
+                <a:latin typeface="Microsoft YaHei"/>
+                <a:ea typeface="Microsoft YaHei"/>
+                <a:cs typeface="Microsoft YaHei"/>
+              </a:rPr>
+              <a:t>版式边界明确</a:t>
+            </a:r>
+          </a:p>
+        </p:txBody>
+      </p:sp>
+      <p:sp>
+        <p:nvSpPr>
+          <p:cNvPr id="28" name="PPAGENT_QA|parent=comparison-right-row-2|domains=comparison-right-rows">
+            <a:extLst xmlns:a="http://schemas.openxmlformats.org/drawingml/2006/main">
+              <a:ext uri="{FF2B5EF4-FFF2-40B4-BE49-F238E27FC236}">
+                <a16:creationId xmlns:a16="http://schemas.microsoft.com/office/drawing/2014/main" id="{99248C49-E2DE-41C3-BAB0-286E064A3E44}"/>
+              </a:ext>
+            </a:extLst>
+          </p:cNvPr>
+          <p:cNvSpPr>
+            <a:spLocks xmlns:a="http://schemas.openxmlformats.org/drawingml/2006/main" noGrp="1"/>
+          </p:cNvSpPr>
+          <p:nvPr/>
+        </p:nvSpPr>
+        <p:spPr>
+          <a:xfrm xmlns:a="http://schemas.openxmlformats.org/drawingml/2006/main">
+            <a:off x="7505700" y="4019550"/>
+            <a:ext cx="3467100" cy="514350"/>
+          </a:xfrm>
+          <a:prstGeom xmlns:a="http://schemas.openxmlformats.org/drawingml/2006/main" prst="roundRect">
+            <a:avLst>
+              <a:gd name="adj" fmla="val 50000"/>
+            </a:avLst>
+          </a:prstGeom>
+          <a:gradFill xmlns:a="http://schemas.openxmlformats.org/drawingml/2006/main">
+            <a:gsLst>
+              <a:gs pos="0">
+                <a:srgbClr val="00A8D8"/>
+              </a:gs>
+              <a:gs pos="100000">
+                <a:srgbClr val="379BEF"/>
+              </a:gs>
+            </a:gsLst>
+            <a:lin ang="0"/>
+          </a:gradFill>
+          <a:ln xmlns:a="http://schemas.openxmlformats.org/drawingml/2006/main" w="9525">
+            <a:solidFill>
+              <a:srgbClr val="14CBD1"/>
+            </a:solidFill>
+            <a:prstDash val="solid"/>
+          </a:ln>
+        </p:spPr>
+        <p:style>
+          <a:lnRef xmlns:a="http://schemas.openxmlformats.org/drawingml/2006/main" idx="0"/>
+          <a:fillRef xmlns:a="http://schemas.openxmlformats.org/drawingml/2006/main" idx="0"/>
+          <a:effectRef xmlns:a="http://schemas.openxmlformats.org/drawingml/2006/main" idx="6"/>
+          <a:fontRef xmlns:a="http://schemas.openxmlformats.org/drawingml/2006/main" idx="major"/>
+        </p:style>
+      </p:sp>
+      <p:sp>
+        <p:nvSpPr>
+          <p:cNvPr id="29" name="PPAGENT_QA|within=comparison-right-row-2|role=status-marker">
+            <a:extLst xmlns:a="http://schemas.openxmlformats.org/drawingml/2006/main">
+              <a:ext uri="{FF2B5EF4-FFF2-40B4-BE49-F238E27FC236}">
+                <a16:creationId xmlns:a16="http://schemas.microsoft.com/office/drawing/2014/main" id="{6860CEE8-D3B2-4440-BA64-B86C1A4478D2}"/>
+              </a:ext>
+            </a:extLst>
+          </p:cNvPr>
+          <p:cNvSpPr>
+            <a:spLocks xmlns:a="http://schemas.openxmlformats.org/drawingml/2006/main" noGrp="1"/>
+          </p:cNvSpPr>
+          <p:nvPr/>
+        </p:nvSpPr>
+        <p:spPr>
+          <a:xfrm xmlns:a="http://schemas.openxmlformats.org/drawingml/2006/main">
+            <a:off x="7639050" y="4133850"/>
+            <a:ext cx="285750" cy="285750"/>
+          </a:xfrm>
+          <a:prstGeom xmlns:a="http://schemas.openxmlformats.org/drawingml/2006/main" prst="ellipse">
+            <a:avLst/>
+          </a:prstGeom>
+          <a:solidFill xmlns:a="http://schemas.openxmlformats.org/drawingml/2006/main">
+            <a:srgbClr val="00A8D8"/>
+          </a:solidFill>
+          <a:ln xmlns:a="http://schemas.openxmlformats.org/drawingml/2006/main" w="0">
+            <a:noFill/>
+            <a:prstDash val="solid"/>
+          </a:ln>
+        </p:spPr>
+        <p:txBody>
+          <a:bodyPr xmlns:a="http://schemas.openxmlformats.org/drawingml/2006/main" lIns="0" tIns="0" rIns="0" bIns="0" anchor="ctr">
+            <a:normAutofit fontScale="100000"/>
+          </a:bodyPr>
+          <a:lstStyle xmlns:a="http://schemas.openxmlformats.org/drawingml/2006/main"/>
+          <a:p xmlns:a="http://schemas.openxmlformats.org/drawingml/2006/main">
+            <a:pPr algn="ctr">
+              <a:defRPr sz="1200" b="1">
+                <a:solidFill>
+                  <a:srgbClr val="FFFFFF"/>
+                </a:solidFill>
+                <a:latin typeface="Microsoft YaHei"/>
+                <a:ea typeface="Microsoft YaHei"/>
+                <a:cs typeface="Microsoft YaHei"/>
+              </a:defRPr>
+            </a:pPr>
+            <a:r>
+              <a:rPr sz="1200" b="1">
+                <a:solidFill>
+                  <a:srgbClr val="FFFFFF"/>
+                </a:solidFill>
+                <a:latin typeface="Microsoft YaHei"/>
+                <a:ea typeface="Microsoft YaHei"/>
+                <a:cs typeface="Microsoft YaHei"/>
+              </a:rPr>
+              <a:t>✓</a:t>
+            </a:r>
+          </a:p>
+        </p:txBody>
+      </p:sp>
+      <p:sp>
+        <p:nvSpPr>
+          <p:cNvPr id="30" name="PPAGENT_QA|within=comparison-right-row-2|role=item-text">
+            <a:extLst xmlns:a="http://schemas.openxmlformats.org/drawingml/2006/main">
+              <a:ext uri="{FF2B5EF4-FFF2-40B4-BE49-F238E27FC236}">
+                <a16:creationId xmlns:a16="http://schemas.microsoft.com/office/drawing/2014/main" id="{CFCF4BB5-FE57-4CEF-98AA-E88C38A8BE9D}"/>
+              </a:ext>
+            </a:extLst>
+          </p:cNvPr>
+          <p:cNvSpPr>
+            <a:spLocks xmlns:a="http://schemas.openxmlformats.org/drawingml/2006/main" noGrp="1"/>
+          </p:cNvSpPr>
+          <p:nvPr/>
+        </p:nvSpPr>
+        <p:spPr>
+          <a:xfrm xmlns:a="http://schemas.openxmlformats.org/drawingml/2006/main">
+            <a:off x="8020050" y="4076700"/>
+            <a:ext cx="2724150" cy="400050"/>
+          </a:xfrm>
+          <a:prstGeom xmlns:a="http://schemas.openxmlformats.org/drawingml/2006/main" prst="rect">
+            <a:avLst/>
+          </a:prstGeom>
+          <a:noFill xmlns:a="http://schemas.openxmlformats.org/drawingml/2006/main"/>
+          <a:ln xmlns:a="http://schemas.openxmlformats.org/drawingml/2006/main" w="0">
+            <a:noFill/>
+            <a:prstDash val="solid"/>
+          </a:ln>
+        </p:spPr>
+        <p:txBody>
+          <a:bodyPr xmlns:a="http://schemas.openxmlformats.org/drawingml/2006/main" lIns="0" tIns="0" rIns="0" bIns="0" anchor="ctr">
+            <a:normAutofit fontScale="100000"/>
+          </a:bodyPr>
+          <a:lstStyle xmlns:a="http://schemas.openxmlformats.org/drawingml/2006/main"/>
+          <a:p xmlns:a="http://schemas.openxmlformats.org/drawingml/2006/main">
+            <a:pPr algn="ctr">
+              <a:defRPr sz="1350" b="0">
+                <a:solidFill>
+                  <a:srgbClr val="FFFFFF"/>
+                </a:solidFill>
+                <a:latin typeface="Microsoft YaHei"/>
+                <a:ea typeface="Microsoft YaHei"/>
+                <a:cs typeface="Microsoft YaHei"/>
+              </a:defRPr>
+            </a:pPr>
+            <a:r>
+              <a:rPr sz="1350" b="0">
+                <a:solidFill>
+                  <a:srgbClr val="FFFFFF"/>
+                </a:solidFill>
+                <a:latin typeface="Microsoft YaHei"/>
+                <a:ea typeface="Microsoft YaHei"/>
+                <a:cs typeface="Microsoft YaHei"/>
+              </a:rPr>
+              <a:t>问题可以回归</a:t>
+            </a:r>
+          </a:p>
+        </p:txBody>
+      </p:sp>
+      <p:sp>
+        <p:nvSpPr>
+          <p:cNvPr id="31" name="PPAGENT_QA|parent=comparison-right-row-3|domains=comparison-right-rows">
+            <a:extLst xmlns:a="http://schemas.openxmlformats.org/drawingml/2006/main">
+              <a:ext uri="{FF2B5EF4-FFF2-40B4-BE49-F238E27FC236}">
+                <a16:creationId xmlns:a16="http://schemas.microsoft.com/office/drawing/2014/main" id="{FDA70C29-506D-4C01-952E-6E117FE06507}"/>
+              </a:ext>
+            </a:extLst>
+          </p:cNvPr>
+          <p:cNvSpPr>
+            <a:spLocks xmlns:a="http://schemas.openxmlformats.org/drawingml/2006/main" noGrp="1"/>
+          </p:cNvSpPr>
+          <p:nvPr/>
+        </p:nvSpPr>
+        <p:spPr>
+          <a:xfrm xmlns:a="http://schemas.openxmlformats.org/drawingml/2006/main">
+            <a:off x="7505700" y="4857750"/>
+            <a:ext cx="3467100" cy="514350"/>
+          </a:xfrm>
+          <a:prstGeom xmlns:a="http://schemas.openxmlformats.org/drawingml/2006/main" prst="roundRect">
+            <a:avLst>
+              <a:gd name="adj" fmla="val 50000"/>
+            </a:avLst>
+          </a:prstGeom>
+          <a:gradFill xmlns:a="http://schemas.openxmlformats.org/drawingml/2006/main">
+            <a:gsLst>
+              <a:gs pos="0">
+                <a:srgbClr val="00A8D8"/>
+              </a:gs>
+              <a:gs pos="100000">
+                <a:srgbClr val="379BEF"/>
+              </a:gs>
+            </a:gsLst>
+            <a:lin ang="0"/>
+          </a:gradFill>
+          <a:ln xmlns:a="http://schemas.openxmlformats.org/drawingml/2006/main" w="9525">
+            <a:solidFill>
+              <a:srgbClr val="14CBD1"/>
+            </a:solidFill>
+            <a:prstDash val="solid"/>
+          </a:ln>
+        </p:spPr>
+        <p:style>
+          <a:lnRef xmlns:a="http://schemas.openxmlformats.org/drawingml/2006/main" idx="0"/>
+          <a:fillRef xmlns:a="http://schemas.openxmlformats.org/drawingml/2006/main" idx="0"/>
+          <a:effectRef xmlns:a="http://schemas.openxmlformats.org/drawingml/2006/main" idx="6"/>
+          <a:fontRef xmlns:a="http://schemas.openxmlformats.org/drawingml/2006/main" idx="major"/>
+        </p:style>
+      </p:sp>
+      <p:sp>
+        <p:nvSpPr>
+          <p:cNvPr id="32" name="PPAGENT_QA|within=comparison-right-row-3|role=status-marker">
+            <a:extLst xmlns:a="http://schemas.openxmlformats.org/drawingml/2006/main">
+              <a:ext uri="{FF2B5EF4-FFF2-40B4-BE49-F238E27FC236}">
+                <a16:creationId xmlns:a16="http://schemas.microsoft.com/office/drawing/2014/main" id="{0113E20B-30C2-41BF-9EDB-710A6E5AC234}"/>
+              </a:ext>
+            </a:extLst>
+          </p:cNvPr>
+          <p:cNvSpPr>
+            <a:spLocks xmlns:a="http://schemas.openxmlformats.org/drawingml/2006/main" noGrp="1"/>
+          </p:cNvSpPr>
+          <p:nvPr/>
+        </p:nvSpPr>
+        <p:spPr>
+          <a:xfrm xmlns:a="http://schemas.openxmlformats.org/drawingml/2006/main">
+            <a:off x="7639050" y="4972050"/>
+            <a:ext cx="285750" cy="285750"/>
+          </a:xfrm>
+          <a:prstGeom xmlns:a="http://schemas.openxmlformats.org/drawingml/2006/main" prst="ellipse">
+            <a:avLst/>
+          </a:prstGeom>
+          <a:solidFill xmlns:a="http://schemas.openxmlformats.org/drawingml/2006/main">
+            <a:srgbClr val="00A8D8"/>
+          </a:solidFill>
+          <a:ln xmlns:a="http://schemas.openxmlformats.org/drawingml/2006/main" w="0">
+            <a:noFill/>
+            <a:prstDash val="solid"/>
+          </a:ln>
+        </p:spPr>
+        <p:txBody>
+          <a:bodyPr xmlns:a="http://schemas.openxmlformats.org/drawingml/2006/main" lIns="0" tIns="0" rIns="0" bIns="0" anchor="ctr">
+            <a:normAutofit fontScale="100000"/>
+          </a:bodyPr>
+          <a:lstStyle xmlns:a="http://schemas.openxmlformats.org/drawingml/2006/main"/>
+          <a:p xmlns:a="http://schemas.openxmlformats.org/drawingml/2006/main">
+            <a:pPr algn="ctr">
+              <a:defRPr sz="1200" b="1">
+                <a:solidFill>
+                  <a:srgbClr val="FFFFFF"/>
+                </a:solidFill>
+                <a:latin typeface="Microsoft YaHei"/>
+                <a:ea typeface="Microsoft YaHei"/>
+                <a:cs typeface="Microsoft YaHei"/>
+              </a:defRPr>
+            </a:pPr>
+            <a:r>
+              <a:rPr sz="1200" b="1">
+                <a:solidFill>
+                  <a:srgbClr val="FFFFFF"/>
+                </a:solidFill>
+                <a:latin typeface="Microsoft YaHei"/>
+                <a:ea typeface="Microsoft YaHei"/>
+                <a:cs typeface="Microsoft YaHei"/>
+              </a:rPr>
+              <a:t>✓</a:t>
+            </a:r>
+          </a:p>
+        </p:txBody>
+      </p:sp>
+      <p:sp>
+        <p:nvSpPr>
+          <p:cNvPr id="33" name="PPAGENT_QA|within=comparison-right-row-3|role=item-text">
+            <a:extLst xmlns:a="http://schemas.openxmlformats.org/drawingml/2006/main">
+              <a:ext uri="{FF2B5EF4-FFF2-40B4-BE49-F238E27FC236}">
+                <a16:creationId xmlns:a16="http://schemas.microsoft.com/office/drawing/2014/main" id="{D80DD785-E1A0-44C9-BEDE-68A0E9764D4A}"/>
+              </a:ext>
+            </a:extLst>
+          </p:cNvPr>
+          <p:cNvSpPr>
+            <a:spLocks xmlns:a="http://schemas.openxmlformats.org/drawingml/2006/main" noGrp="1"/>
+          </p:cNvSpPr>
+          <p:nvPr/>
+        </p:nvSpPr>
+        <p:spPr>
+          <a:xfrm xmlns:a="http://schemas.openxmlformats.org/drawingml/2006/main">
+            <a:off x="8020050" y="4914900"/>
+            <a:ext cx="2724150" cy="400050"/>
+          </a:xfrm>
+          <a:prstGeom xmlns:a="http://schemas.openxmlformats.org/drawingml/2006/main" prst="rect">
+            <a:avLst/>
+          </a:prstGeom>
+          <a:noFill xmlns:a="http://schemas.openxmlformats.org/drawingml/2006/main"/>
+          <a:ln xmlns:a="http://schemas.openxmlformats.org/drawingml/2006/main" w="0">
+            <a:noFill/>
+            <a:prstDash val="solid"/>
+          </a:ln>
+        </p:spPr>
+        <p:txBody>
+          <a:bodyPr xmlns:a="http://schemas.openxmlformats.org/drawingml/2006/main" lIns="0" tIns="0" rIns="0" bIns="0" anchor="ctr">
+            <a:normAutofit fontScale="100000"/>
+          </a:bodyPr>
+          <a:lstStyle xmlns:a="http://schemas.openxmlformats.org/drawingml/2006/main"/>
+          <a:p xmlns:a="http://schemas.openxmlformats.org/drawingml/2006/main">
+            <a:pPr algn="ctr">
+              <a:defRPr sz="1350" b="0">
+                <a:solidFill>
+                  <a:srgbClr val="FFFFFF"/>
+                </a:solidFill>
+                <a:latin typeface="Microsoft YaHei"/>
+                <a:ea typeface="Microsoft YaHei"/>
+                <a:cs typeface="Microsoft YaHei"/>
+              </a:defRPr>
+            </a:pPr>
+            <a:r>
+              <a:rPr sz="1350" b="0">
+                <a:solidFill>
+                  <a:srgbClr val="FFFFFF"/>
+                </a:solidFill>
+                <a:latin typeface="Microsoft YaHei"/>
+                <a:ea typeface="Microsoft YaHei"/>
+                <a:cs typeface="Microsoft YaHei"/>
+              </a:rPr>
+              <a:t>能力持续积累</a:t>
+            </a:r>
+          </a:p>
+        </p:txBody>
+      </p:sp>
+      <p:sp>
+        <p:nvSpPr>
+          <p:cNvPr id="34" name="PPAGENT_QA|parent=comparison-center|domains=comparison-panels">
+            <a:extLst xmlns:a="http://schemas.openxmlformats.org/drawingml/2006/main">
+              <a:ext uri="{FF2B5EF4-FFF2-40B4-BE49-F238E27FC236}">
+                <a16:creationId xmlns:a16="http://schemas.microsoft.com/office/drawing/2014/main" id="{9571630F-92D4-48A2-AC0A-5BF13007611B}"/>
+              </a:ext>
+            </a:extLst>
+          </p:cNvPr>
+          <p:cNvSpPr>
+            <a:spLocks xmlns:a="http://schemas.openxmlformats.org/drawingml/2006/main" noGrp="1"/>
+          </p:cNvSpPr>
+          <p:nvPr/>
+        </p:nvSpPr>
+        <p:spPr>
+          <a:xfrm xmlns:a="http://schemas.openxmlformats.org/drawingml/2006/main">
+            <a:off x="5429250" y="2857500"/>
+            <a:ext cx="1333500" cy="1333500"/>
+          </a:xfrm>
+          <a:prstGeom xmlns:a="http://schemas.openxmlformats.org/drawingml/2006/main" prst="ellipse">
+            <a:avLst/>
+          </a:prstGeom>
+          <a:noFill xmlns:a="http://schemas.openxmlformats.org/drawingml/2006/main"/>
+          <a:ln xmlns:a="http://schemas.openxmlformats.org/drawingml/2006/main" w="14288">
+            <a:solidFill>
+              <a:srgbClr val="AAB8C7"/>
+            </a:solidFill>
+            <a:prstDash val="dash"/>
+          </a:ln>
+        </p:spPr>
+      </p:sp>
+      <p:sp>
+        <p:nvSpPr>
+          <p:cNvPr id="35" name="PPAGENT_QA|within=comparison-center|role=center-disc">
+            <a:extLst xmlns:a="http://schemas.openxmlformats.org/drawingml/2006/main">
+              <a:ext uri="{FF2B5EF4-FFF2-40B4-BE49-F238E27FC236}">
+                <a16:creationId xmlns:a16="http://schemas.microsoft.com/office/drawing/2014/main" id="{5E4AC7C4-B97C-42E5-9615-DF07925C8236}"/>
+              </a:ext>
+            </a:extLst>
+          </p:cNvPr>
+          <p:cNvSpPr>
+            <a:spLocks xmlns:a="http://schemas.openxmlformats.org/drawingml/2006/main" noGrp="1"/>
+          </p:cNvSpPr>
+          <p:nvPr/>
+        </p:nvSpPr>
+        <p:spPr>
+          <a:xfrm xmlns:a="http://schemas.openxmlformats.org/drawingml/2006/main">
+            <a:off x="5581650" y="3009900"/>
+            <a:ext cx="1028700" cy="1028700"/>
+          </a:xfrm>
+          <a:prstGeom xmlns:a="http://schemas.openxmlformats.org/drawingml/2006/main" prst="ellipse">
+            <a:avLst/>
+          </a:prstGeom>
+          <a:gradFill xmlns:a="http://schemas.openxmlformats.org/drawingml/2006/main">
+            <a:gsLst>
+              <a:gs pos="0">
+                <a:srgbClr val="1677C8"/>
+              </a:gs>
+              <a:gs pos="100000">
+                <a:srgbClr val="00A8D8"/>
+              </a:gs>
+            </a:gsLst>
+            <a:lin ang="8100000"/>
+          </a:gradFill>
+          <a:ln xmlns:a="http://schemas.openxmlformats.org/drawingml/2006/main" w="19050">
+            <a:solidFill>
+              <a:srgbClr val="FFFFFF"/>
+            </a:solidFill>
             <a:prstDash val="solid"/>
           </a:ln>
         </p:spPr>
@@ -1205,13 +2922,13 @@
           <a:fontRef xmlns:a="http://schemas.openxmlformats.org/drawingml/2006/main" idx="major"/>
         </p:style>
         <p:txBody>
-          <a:bodyPr xmlns:a="http://schemas.openxmlformats.org/drawingml/2006/main" lIns="114300" tIns="76200" rIns="114300" bIns="76200" anchor="ctr">
+          <a:bodyPr xmlns:a="http://schemas.openxmlformats.org/drawingml/2006/main" lIns="38100" tIns="38100" rIns="38100" bIns="38100" anchor="ctr">
             <a:normAutofit fontScale="100000"/>
           </a:bodyPr>
           <a:lstStyle xmlns:a="http://schemas.openxmlformats.org/drawingml/2006/main"/>
           <a:p xmlns:a="http://schemas.openxmlformats.org/drawingml/2006/main">
             <a:pPr algn="ctr">
-              <a:defRPr sz="2100" b="1">
+              <a:defRPr sz="1950" b="1">
                 <a:solidFill>
                   <a:srgbClr val="FFFFFF"/>
                 </a:solidFill>
@@ -1221,7 +2938,7 @@
               </a:defRPr>
             </a:pPr>
             <a:r>
-              <a:rPr sz="2100" b="1">
+              <a:rPr sz="1950" b="1">
                 <a:solidFill>
                   <a:srgbClr val="FFFFFF"/>
                 </a:solidFill>
@@ -1229,578 +2946,77 @@
                 <a:ea typeface="Microsoft YaHei"/>
                 <a:cs typeface="Microsoft YaHei"/>
               </a:rPr>
-              <a:t>方案 A</a:t>
+              <a:t>VS</a:t>
             </a:r>
           </a:p>
         </p:txBody>
       </p:sp>
       <p:sp>
         <p:nvSpPr>
-          <p:cNvPr id="4" name="">
-            <a:extLst xmlns:a="http://schemas.openxmlformats.org/drawingml/2006/main">
-              <a:ext uri="{FF2B5EF4-FFF2-40B4-BE49-F238E27FC236}">
-                <a16:creationId xmlns:a16="http://schemas.microsoft.com/office/drawing/2014/main" id="{212E7D3D-C5FD-4EE1-A8BA-AD8A52E88408}"/>
-              </a:ext>
-            </a:extLst>
-          </p:cNvPr>
-          <p:cNvSpPr>
-            <a:spLocks xmlns:a="http://schemas.openxmlformats.org/drawingml/2006/main" noGrp="1"/>
-          </p:cNvSpPr>
-          <p:nvPr/>
-        </p:nvSpPr>
-        <p:spPr>
-          <a:xfrm xmlns:a="http://schemas.openxmlformats.org/drawingml/2006/main">
-            <a:off x="6667500" y="2143125"/>
-            <a:ext cx="2381250" cy="2381250"/>
+          <p:cNvPr id="36" name="">
+            <a:extLst xmlns:a="http://schemas.openxmlformats.org/drawingml/2006/main">
+              <a:ext uri="{FF2B5EF4-FFF2-40B4-BE49-F238E27FC236}">
+                <a16:creationId xmlns:a16="http://schemas.microsoft.com/office/drawing/2014/main" id="{0940DB1C-2335-4868-916C-FB37440F0232}"/>
+              </a:ext>
+            </a:extLst>
+          </p:cNvPr>
+          <p:cNvSpPr>
+            <a:spLocks xmlns:a="http://schemas.openxmlformats.org/drawingml/2006/main" noGrp="1"/>
+          </p:cNvSpPr>
+          <p:nvPr/>
+        </p:nvSpPr>
+        <p:spPr>
+          <a:xfrm xmlns:a="http://schemas.openxmlformats.org/drawingml/2006/main">
+            <a:off x="590550" y="5762625"/>
+            <a:ext cx="11010900" cy="400050"/>
           </a:xfrm>
           <a:prstGeom xmlns:a="http://schemas.openxmlformats.org/drawingml/2006/main" prst="ellipse">
             <a:avLst/>
           </a:prstGeom>
-          <a:solidFill xmlns:a="http://schemas.openxmlformats.org/drawingml/2006/main">
-            <a:srgbClr val="00A8D8"/>
-          </a:solidFill>
-          <a:ln xmlns:a="http://schemas.openxmlformats.org/drawingml/2006/main" w="0">
-            <a:noFill/>
-            <a:prstDash val="solid"/>
-          </a:ln>
-        </p:spPr>
-        <p:style>
-          <a:lnRef xmlns:a="http://schemas.openxmlformats.org/drawingml/2006/main" idx="0"/>
-          <a:fillRef xmlns:a="http://schemas.openxmlformats.org/drawingml/2006/main" idx="0"/>
-          <a:effectRef xmlns:a="http://schemas.openxmlformats.org/drawingml/2006/main" idx="7"/>
-          <a:fontRef xmlns:a="http://schemas.openxmlformats.org/drawingml/2006/main" idx="major"/>
-        </p:style>
-        <p:txBody>
-          <a:bodyPr xmlns:a="http://schemas.openxmlformats.org/drawingml/2006/main" lIns="114300" tIns="76200" rIns="114300" bIns="76200" anchor="ctr">
-            <a:normAutofit fontScale="100000"/>
-          </a:bodyPr>
-          <a:lstStyle xmlns:a="http://schemas.openxmlformats.org/drawingml/2006/main"/>
-          <a:p xmlns:a="http://schemas.openxmlformats.org/drawingml/2006/main">
-            <a:pPr algn="ctr">
-              <a:defRPr sz="2100" b="1">
-                <a:solidFill>
-                  <a:srgbClr val="FFFFFF"/>
-                </a:solidFill>
-                <a:latin typeface="Microsoft YaHei"/>
-                <a:ea typeface="Microsoft YaHei"/>
-                <a:cs typeface="Microsoft YaHei"/>
-              </a:defRPr>
-            </a:pPr>
-            <a:r>
-              <a:rPr sz="2100" b="1">
-                <a:solidFill>
-                  <a:srgbClr val="FFFFFF"/>
-                </a:solidFill>
-                <a:latin typeface="Microsoft YaHei"/>
-                <a:ea typeface="Microsoft YaHei"/>
-                <a:cs typeface="Microsoft YaHei"/>
-              </a:rPr>
-              <a:t>方案 B</a:t>
-            </a:r>
-          </a:p>
-        </p:txBody>
-      </p:sp>
-      <p:cxnSp>
-        <p:nvCxnSpPr>
-          <p:cNvPr id="17" name=""/>
-          <p:cNvCxnSpPr>
-            <a:stCxn xmlns:a="http://schemas.openxmlformats.org/drawingml/2006/main" id="3" idx="6"/>
-            <a:endCxn xmlns:a="http://schemas.openxmlformats.org/drawingml/2006/main" id="4" idx="2"/>
-          </p:cNvCxnSpPr>
-          <p:nvPr/>
-        </p:nvCxnSpPr>
-        <p:spPr>
-          <a:xfrm xmlns:a="http://schemas.openxmlformats.org/drawingml/2006/main">
-            <a:off x="5524500" y="3333750"/>
-            <a:ext cx="1143000" cy="0"/>
-          </a:xfrm>
-          <a:prstGeom xmlns:a="http://schemas.openxmlformats.org/drawingml/2006/main" prst="straightConnector1">
-            <a:avLst/>
-          </a:prstGeom>
-          <a:ln xmlns:a="http://schemas.openxmlformats.org/drawingml/2006/main" w="38100">
+          <a:noFill xmlns:a="http://schemas.openxmlformats.org/drawingml/2006/main"/>
+          <a:ln xmlns:a="http://schemas.openxmlformats.org/drawingml/2006/main" w="14288">
             <a:solidFill>
               <a:srgbClr val="14CBD1"/>
             </a:solidFill>
+            <a:prstDash val="dash"/>
+          </a:ln>
+        </p:spPr>
+      </p:sp>
+      <p:sp>
+        <p:nvSpPr>
+          <p:cNvPr id="37" name="">
+            <a:extLst xmlns:a="http://schemas.openxmlformats.org/drawingml/2006/main">
+              <a:ext uri="{FF2B5EF4-FFF2-40B4-BE49-F238E27FC236}">
+                <a16:creationId xmlns:a16="http://schemas.microsoft.com/office/drawing/2014/main" id="{A040E99F-20CB-483F-8A88-21C8C0E2AB08}"/>
+              </a:ext>
+            </a:extLst>
+          </p:cNvPr>
+          <p:cNvSpPr>
+            <a:spLocks xmlns:a="http://schemas.openxmlformats.org/drawingml/2006/main" noGrp="1"/>
+          </p:cNvSpPr>
+          <p:nvPr/>
+        </p:nvSpPr>
+        <p:spPr>
+          <a:xfrm xmlns:a="http://schemas.openxmlformats.org/drawingml/2006/main">
+            <a:off x="876300" y="5819775"/>
+            <a:ext cx="10439400" cy="304800"/>
+          </a:xfrm>
+          <a:prstGeom xmlns:a="http://schemas.openxmlformats.org/drawingml/2006/main" prst="ellipse">
+            <a:avLst/>
+          </a:prstGeom>
+          <a:noFill xmlns:a="http://schemas.openxmlformats.org/drawingml/2006/main"/>
+          <a:ln xmlns:a="http://schemas.openxmlformats.org/drawingml/2006/main" w="28575">
+            <a:solidFill>
+              <a:srgbClr val="1677C8"/>
+            </a:solidFill>
             <a:prstDash val="solid"/>
-            <a:headEnd type="triangle" w="med" len="med"/>
-            <a:tailEnd type="triangle" w="med" len="med"/>
-          </a:ln>
-        </p:spPr>
-      </p:cxnSp>
-      <p:sp>
-        <p:nvSpPr>
-          <p:cNvPr id="6" name="">
-            <a:extLst xmlns:a="http://schemas.openxmlformats.org/drawingml/2006/main">
-              <a:ext uri="{FF2B5EF4-FFF2-40B4-BE49-F238E27FC236}">
-                <a16:creationId xmlns:a16="http://schemas.microsoft.com/office/drawing/2014/main" id="{09A48C18-1840-4BF6-ABF2-55D34641AF9B}"/>
-              </a:ext>
-            </a:extLst>
-          </p:cNvPr>
-          <p:cNvSpPr>
-            <a:spLocks xmlns:a="http://schemas.openxmlformats.org/drawingml/2006/main" noGrp="1"/>
-          </p:cNvSpPr>
-          <p:nvPr/>
-        </p:nvSpPr>
-        <p:spPr>
-          <a:xfrm xmlns:a="http://schemas.openxmlformats.org/drawingml/2006/main">
-            <a:off x="666750" y="2266950"/>
-            <a:ext cx="2190750" cy="419100"/>
-          </a:xfrm>
-          <a:prstGeom xmlns:a="http://schemas.openxmlformats.org/drawingml/2006/main" prst="roundRect">
-            <a:avLst>
-              <a:gd name="adj" fmla="val 27273"/>
-            </a:avLst>
-          </a:prstGeom>
-          <a:solidFill xmlns:a="http://schemas.openxmlformats.org/drawingml/2006/main">
-            <a:srgbClr val="1677C8"/>
-          </a:solidFill>
-          <a:ln xmlns:a="http://schemas.openxmlformats.org/drawingml/2006/main" w="0">
-            <a:noFill/>
-            <a:prstDash val="solid"/>
-          </a:ln>
-        </p:spPr>
-        <p:style>
-          <a:lnRef xmlns:a="http://schemas.openxmlformats.org/drawingml/2006/main" idx="0"/>
-          <a:fillRef xmlns:a="http://schemas.openxmlformats.org/drawingml/2006/main" idx="0"/>
-          <a:effectRef xmlns:a="http://schemas.openxmlformats.org/drawingml/2006/main" idx="4"/>
-          <a:fontRef xmlns:a="http://schemas.openxmlformats.org/drawingml/2006/main" idx="major"/>
-        </p:style>
-        <p:txBody>
-          <a:bodyPr xmlns:a="http://schemas.openxmlformats.org/drawingml/2006/main" lIns="114300" tIns="76200" rIns="114300" bIns="76200" anchor="ctr">
-            <a:normAutofit fontScale="100000"/>
-          </a:bodyPr>
-          <a:lstStyle xmlns:a="http://schemas.openxmlformats.org/drawingml/2006/main"/>
-          <a:p xmlns:a="http://schemas.openxmlformats.org/drawingml/2006/main">
-            <a:pPr algn="ctr">
-              <a:defRPr sz="1200" b="1">
-                <a:solidFill>
-                  <a:srgbClr val="FFFFFF"/>
-                </a:solidFill>
-                <a:latin typeface="Microsoft YaHei"/>
-                <a:ea typeface="Microsoft YaHei"/>
-                <a:cs typeface="Microsoft YaHei"/>
-              </a:defRPr>
-            </a:pPr>
-            <a:r>
-              <a:rPr sz="1200" b="1">
-                <a:solidFill>
-                  <a:srgbClr val="FFFFFF"/>
-                </a:solidFill>
-                <a:latin typeface="Microsoft YaHei"/>
-                <a:ea typeface="Microsoft YaHei"/>
-                <a:cs typeface="Microsoft YaHei"/>
-              </a:rPr>
-              <a:t>优势一</a:t>
-            </a:r>
-          </a:p>
-        </p:txBody>
-      </p:sp>
-      <p:sp>
-        <p:nvSpPr>
-          <p:cNvPr id="7" name="">
-            <a:extLst xmlns:a="http://schemas.openxmlformats.org/drawingml/2006/main">
-              <a:ext uri="{FF2B5EF4-FFF2-40B4-BE49-F238E27FC236}">
-                <a16:creationId xmlns:a16="http://schemas.microsoft.com/office/drawing/2014/main" id="{49000C74-F206-45C7-9F1D-03EF37F7AEE7}"/>
-              </a:ext>
-            </a:extLst>
-          </p:cNvPr>
-          <p:cNvSpPr>
-            <a:spLocks xmlns:a="http://schemas.openxmlformats.org/drawingml/2006/main" noGrp="1"/>
-          </p:cNvSpPr>
-          <p:nvPr/>
-        </p:nvSpPr>
-        <p:spPr>
-          <a:xfrm xmlns:a="http://schemas.openxmlformats.org/drawingml/2006/main">
-            <a:off x="666750" y="2895600"/>
-            <a:ext cx="2190750" cy="419100"/>
-          </a:xfrm>
-          <a:prstGeom xmlns:a="http://schemas.openxmlformats.org/drawingml/2006/main" prst="roundRect">
-            <a:avLst>
-              <a:gd name="adj" fmla="val 27273"/>
-            </a:avLst>
-          </a:prstGeom>
-          <a:solidFill xmlns:a="http://schemas.openxmlformats.org/drawingml/2006/main">
-            <a:srgbClr val="1677C8"/>
-          </a:solidFill>
-          <a:ln xmlns:a="http://schemas.openxmlformats.org/drawingml/2006/main" w="0">
-            <a:noFill/>
-            <a:prstDash val="solid"/>
-          </a:ln>
-        </p:spPr>
-        <p:style>
-          <a:lnRef xmlns:a="http://schemas.openxmlformats.org/drawingml/2006/main" idx="0"/>
-          <a:fillRef xmlns:a="http://schemas.openxmlformats.org/drawingml/2006/main" idx="0"/>
-          <a:effectRef xmlns:a="http://schemas.openxmlformats.org/drawingml/2006/main" idx="4"/>
-          <a:fontRef xmlns:a="http://schemas.openxmlformats.org/drawingml/2006/main" idx="major"/>
-        </p:style>
-        <p:txBody>
-          <a:bodyPr xmlns:a="http://schemas.openxmlformats.org/drawingml/2006/main" lIns="114300" tIns="76200" rIns="114300" bIns="76200" anchor="ctr">
-            <a:normAutofit fontScale="100000"/>
-          </a:bodyPr>
-          <a:lstStyle xmlns:a="http://schemas.openxmlformats.org/drawingml/2006/main"/>
-          <a:p xmlns:a="http://schemas.openxmlformats.org/drawingml/2006/main">
-            <a:pPr algn="ctr">
-              <a:defRPr sz="1200" b="1">
-                <a:solidFill>
-                  <a:srgbClr val="FFFFFF"/>
-                </a:solidFill>
-                <a:latin typeface="Microsoft YaHei"/>
-                <a:ea typeface="Microsoft YaHei"/>
-                <a:cs typeface="Microsoft YaHei"/>
-              </a:defRPr>
-            </a:pPr>
-            <a:r>
-              <a:rPr sz="1200" b="1">
-                <a:solidFill>
-                  <a:srgbClr val="FFFFFF"/>
-                </a:solidFill>
-                <a:latin typeface="Microsoft YaHei"/>
-                <a:ea typeface="Microsoft YaHei"/>
-                <a:cs typeface="Microsoft YaHei"/>
-              </a:rPr>
-              <a:t>优势二</a:t>
-            </a:r>
-          </a:p>
-        </p:txBody>
-      </p:sp>
-      <p:sp>
-        <p:nvSpPr>
-          <p:cNvPr id="8" name="">
-            <a:extLst xmlns:a="http://schemas.openxmlformats.org/drawingml/2006/main">
-              <a:ext uri="{FF2B5EF4-FFF2-40B4-BE49-F238E27FC236}">
-                <a16:creationId xmlns:a16="http://schemas.microsoft.com/office/drawing/2014/main" id="{F72D967A-4BDC-4D1C-B0AC-5CA26423449A}"/>
-              </a:ext>
-            </a:extLst>
-          </p:cNvPr>
-          <p:cNvSpPr>
-            <a:spLocks xmlns:a="http://schemas.openxmlformats.org/drawingml/2006/main" noGrp="1"/>
-          </p:cNvSpPr>
-          <p:nvPr/>
-        </p:nvSpPr>
-        <p:spPr>
-          <a:xfrm xmlns:a="http://schemas.openxmlformats.org/drawingml/2006/main">
-            <a:off x="666750" y="3524250"/>
-            <a:ext cx="2190750" cy="419100"/>
-          </a:xfrm>
-          <a:prstGeom xmlns:a="http://schemas.openxmlformats.org/drawingml/2006/main" prst="roundRect">
-            <a:avLst>
-              <a:gd name="adj" fmla="val 27273"/>
-            </a:avLst>
-          </a:prstGeom>
-          <a:solidFill xmlns:a="http://schemas.openxmlformats.org/drawingml/2006/main">
-            <a:srgbClr val="1677C8"/>
-          </a:solidFill>
-          <a:ln xmlns:a="http://schemas.openxmlformats.org/drawingml/2006/main" w="0">
-            <a:noFill/>
-            <a:prstDash val="solid"/>
-          </a:ln>
-        </p:spPr>
-        <p:style>
-          <a:lnRef xmlns:a="http://schemas.openxmlformats.org/drawingml/2006/main" idx="0"/>
-          <a:fillRef xmlns:a="http://schemas.openxmlformats.org/drawingml/2006/main" idx="0"/>
-          <a:effectRef xmlns:a="http://schemas.openxmlformats.org/drawingml/2006/main" idx="4"/>
-          <a:fontRef xmlns:a="http://schemas.openxmlformats.org/drawingml/2006/main" idx="major"/>
-        </p:style>
-        <p:txBody>
-          <a:bodyPr xmlns:a="http://schemas.openxmlformats.org/drawingml/2006/main" lIns="114300" tIns="76200" rIns="114300" bIns="76200" anchor="ctr">
-            <a:normAutofit fontScale="100000"/>
-          </a:bodyPr>
-          <a:lstStyle xmlns:a="http://schemas.openxmlformats.org/drawingml/2006/main"/>
-          <a:p xmlns:a="http://schemas.openxmlformats.org/drawingml/2006/main">
-            <a:pPr algn="ctr">
-              <a:defRPr sz="1200" b="1">
-                <a:solidFill>
-                  <a:srgbClr val="FFFFFF"/>
-                </a:solidFill>
-                <a:latin typeface="Microsoft YaHei"/>
-                <a:ea typeface="Microsoft YaHei"/>
-                <a:cs typeface="Microsoft YaHei"/>
-              </a:defRPr>
-            </a:pPr>
-            <a:r>
-              <a:rPr sz="1200" b="1">
-                <a:solidFill>
-                  <a:srgbClr val="FFFFFF"/>
-                </a:solidFill>
-                <a:latin typeface="Microsoft YaHei"/>
-                <a:ea typeface="Microsoft YaHei"/>
-                <a:cs typeface="Microsoft YaHei"/>
-              </a:rPr>
-              <a:t>优势三</a:t>
-            </a:r>
-          </a:p>
-        </p:txBody>
-      </p:sp>
-      <p:sp>
-        <p:nvSpPr>
-          <p:cNvPr id="9" name="">
-            <a:extLst xmlns:a="http://schemas.openxmlformats.org/drawingml/2006/main">
-              <a:ext uri="{FF2B5EF4-FFF2-40B4-BE49-F238E27FC236}">
-                <a16:creationId xmlns:a16="http://schemas.microsoft.com/office/drawing/2014/main" id="{CFD3B346-2AB9-43DD-8333-B89B1FB1FBBA}"/>
-              </a:ext>
-            </a:extLst>
-          </p:cNvPr>
-          <p:cNvSpPr>
-            <a:spLocks xmlns:a="http://schemas.openxmlformats.org/drawingml/2006/main" noGrp="1"/>
-          </p:cNvSpPr>
-          <p:nvPr/>
-        </p:nvSpPr>
-        <p:spPr>
-          <a:xfrm xmlns:a="http://schemas.openxmlformats.org/drawingml/2006/main">
-            <a:off x="9334500" y="2266950"/>
-            <a:ext cx="2190750" cy="419100"/>
-          </a:xfrm>
-          <a:prstGeom xmlns:a="http://schemas.openxmlformats.org/drawingml/2006/main" prst="roundRect">
-            <a:avLst>
-              <a:gd name="adj" fmla="val 27273"/>
-            </a:avLst>
-          </a:prstGeom>
-          <a:solidFill xmlns:a="http://schemas.openxmlformats.org/drawingml/2006/main">
-            <a:srgbClr val="00A8D8"/>
-          </a:solidFill>
-          <a:ln xmlns:a="http://schemas.openxmlformats.org/drawingml/2006/main" w="0">
-            <a:noFill/>
-            <a:prstDash val="solid"/>
-          </a:ln>
-        </p:spPr>
-        <p:style>
-          <a:lnRef xmlns:a="http://schemas.openxmlformats.org/drawingml/2006/main" idx="0"/>
-          <a:fillRef xmlns:a="http://schemas.openxmlformats.org/drawingml/2006/main" idx="0"/>
-          <a:effectRef xmlns:a="http://schemas.openxmlformats.org/drawingml/2006/main" idx="4"/>
-          <a:fontRef xmlns:a="http://schemas.openxmlformats.org/drawingml/2006/main" idx="major"/>
-        </p:style>
-        <p:txBody>
-          <a:bodyPr xmlns:a="http://schemas.openxmlformats.org/drawingml/2006/main" lIns="114300" tIns="76200" rIns="114300" bIns="76200" anchor="ctr">
-            <a:normAutofit fontScale="100000"/>
-          </a:bodyPr>
-          <a:lstStyle xmlns:a="http://schemas.openxmlformats.org/drawingml/2006/main"/>
-          <a:p xmlns:a="http://schemas.openxmlformats.org/drawingml/2006/main">
-            <a:pPr algn="ctr">
-              <a:defRPr sz="1200" b="1">
-                <a:solidFill>
-                  <a:srgbClr val="FFFFFF"/>
-                </a:solidFill>
-                <a:latin typeface="Microsoft YaHei"/>
-                <a:ea typeface="Microsoft YaHei"/>
-                <a:cs typeface="Microsoft YaHei"/>
-              </a:defRPr>
-            </a:pPr>
-            <a:r>
-              <a:rPr sz="1200" b="1">
-                <a:solidFill>
-                  <a:srgbClr val="FFFFFF"/>
-                </a:solidFill>
-                <a:latin typeface="Microsoft YaHei"/>
-                <a:ea typeface="Microsoft YaHei"/>
-                <a:cs typeface="Microsoft YaHei"/>
-              </a:rPr>
-              <a:t>优势一</a:t>
-            </a:r>
-          </a:p>
-        </p:txBody>
-      </p:sp>
-      <p:sp>
-        <p:nvSpPr>
-          <p:cNvPr id="10" name="">
-            <a:extLst xmlns:a="http://schemas.openxmlformats.org/drawingml/2006/main">
-              <a:ext uri="{FF2B5EF4-FFF2-40B4-BE49-F238E27FC236}">
-                <a16:creationId xmlns:a16="http://schemas.microsoft.com/office/drawing/2014/main" id="{A46EE969-C2DE-427F-AE27-57F54C2DA63F}"/>
-              </a:ext>
-            </a:extLst>
-          </p:cNvPr>
-          <p:cNvSpPr>
-            <a:spLocks xmlns:a="http://schemas.openxmlformats.org/drawingml/2006/main" noGrp="1"/>
-          </p:cNvSpPr>
-          <p:nvPr/>
-        </p:nvSpPr>
-        <p:spPr>
-          <a:xfrm xmlns:a="http://schemas.openxmlformats.org/drawingml/2006/main">
-            <a:off x="9334500" y="2895600"/>
-            <a:ext cx="2190750" cy="419100"/>
-          </a:xfrm>
-          <a:prstGeom xmlns:a="http://schemas.openxmlformats.org/drawingml/2006/main" prst="roundRect">
-            <a:avLst>
-              <a:gd name="adj" fmla="val 27273"/>
-            </a:avLst>
-          </a:prstGeom>
-          <a:solidFill xmlns:a="http://schemas.openxmlformats.org/drawingml/2006/main">
-            <a:srgbClr val="00A8D8"/>
-          </a:solidFill>
-          <a:ln xmlns:a="http://schemas.openxmlformats.org/drawingml/2006/main" w="0">
-            <a:noFill/>
-            <a:prstDash val="solid"/>
-          </a:ln>
-        </p:spPr>
-        <p:style>
-          <a:lnRef xmlns:a="http://schemas.openxmlformats.org/drawingml/2006/main" idx="0"/>
-          <a:fillRef xmlns:a="http://schemas.openxmlformats.org/drawingml/2006/main" idx="0"/>
-          <a:effectRef xmlns:a="http://schemas.openxmlformats.org/drawingml/2006/main" idx="4"/>
-          <a:fontRef xmlns:a="http://schemas.openxmlformats.org/drawingml/2006/main" idx="major"/>
-        </p:style>
-        <p:txBody>
-          <a:bodyPr xmlns:a="http://schemas.openxmlformats.org/drawingml/2006/main" lIns="114300" tIns="76200" rIns="114300" bIns="76200" anchor="ctr">
-            <a:normAutofit fontScale="100000"/>
-          </a:bodyPr>
-          <a:lstStyle xmlns:a="http://schemas.openxmlformats.org/drawingml/2006/main"/>
-          <a:p xmlns:a="http://schemas.openxmlformats.org/drawingml/2006/main">
-            <a:pPr algn="ctr">
-              <a:defRPr sz="1200" b="1">
-                <a:solidFill>
-                  <a:srgbClr val="FFFFFF"/>
-                </a:solidFill>
-                <a:latin typeface="Microsoft YaHei"/>
-                <a:ea typeface="Microsoft YaHei"/>
-                <a:cs typeface="Microsoft YaHei"/>
-              </a:defRPr>
-            </a:pPr>
-            <a:r>
-              <a:rPr sz="1200" b="1">
-                <a:solidFill>
-                  <a:srgbClr val="FFFFFF"/>
-                </a:solidFill>
-                <a:latin typeface="Microsoft YaHei"/>
-                <a:ea typeface="Microsoft YaHei"/>
-                <a:cs typeface="Microsoft YaHei"/>
-              </a:rPr>
-              <a:t>优势二</a:t>
-            </a:r>
-          </a:p>
-        </p:txBody>
-      </p:sp>
-      <p:sp>
-        <p:nvSpPr>
-          <p:cNvPr id="11" name="">
-            <a:extLst xmlns:a="http://schemas.openxmlformats.org/drawingml/2006/main">
-              <a:ext uri="{FF2B5EF4-FFF2-40B4-BE49-F238E27FC236}">
-                <a16:creationId xmlns:a16="http://schemas.microsoft.com/office/drawing/2014/main" id="{40608755-27AC-4019-B3E9-FC7A82F794A2}"/>
-              </a:ext>
-            </a:extLst>
-          </p:cNvPr>
-          <p:cNvSpPr>
-            <a:spLocks xmlns:a="http://schemas.openxmlformats.org/drawingml/2006/main" noGrp="1"/>
-          </p:cNvSpPr>
-          <p:nvPr/>
-        </p:nvSpPr>
-        <p:spPr>
-          <a:xfrm xmlns:a="http://schemas.openxmlformats.org/drawingml/2006/main">
-            <a:off x="9334500" y="3524250"/>
-            <a:ext cx="2190750" cy="419100"/>
-          </a:xfrm>
-          <a:prstGeom xmlns:a="http://schemas.openxmlformats.org/drawingml/2006/main" prst="roundRect">
-            <a:avLst>
-              <a:gd name="adj" fmla="val 27273"/>
-            </a:avLst>
-          </a:prstGeom>
-          <a:solidFill xmlns:a="http://schemas.openxmlformats.org/drawingml/2006/main">
-            <a:srgbClr val="00A8D8"/>
-          </a:solidFill>
-          <a:ln xmlns:a="http://schemas.openxmlformats.org/drawingml/2006/main" w="0">
-            <a:noFill/>
-            <a:prstDash val="solid"/>
-          </a:ln>
-        </p:spPr>
-        <p:style>
-          <a:lnRef xmlns:a="http://schemas.openxmlformats.org/drawingml/2006/main" idx="0"/>
-          <a:fillRef xmlns:a="http://schemas.openxmlformats.org/drawingml/2006/main" idx="0"/>
-          <a:effectRef xmlns:a="http://schemas.openxmlformats.org/drawingml/2006/main" idx="4"/>
-          <a:fontRef xmlns:a="http://schemas.openxmlformats.org/drawingml/2006/main" idx="major"/>
-        </p:style>
-        <p:txBody>
-          <a:bodyPr xmlns:a="http://schemas.openxmlformats.org/drawingml/2006/main" lIns="114300" tIns="76200" rIns="114300" bIns="76200" anchor="ctr">
-            <a:normAutofit fontScale="100000"/>
-          </a:bodyPr>
-          <a:lstStyle xmlns:a="http://schemas.openxmlformats.org/drawingml/2006/main"/>
-          <a:p xmlns:a="http://schemas.openxmlformats.org/drawingml/2006/main">
-            <a:pPr algn="ctr">
-              <a:defRPr sz="1200" b="1">
-                <a:solidFill>
-                  <a:srgbClr val="FFFFFF"/>
-                </a:solidFill>
-                <a:latin typeface="Microsoft YaHei"/>
-                <a:ea typeface="Microsoft YaHei"/>
-                <a:cs typeface="Microsoft YaHei"/>
-              </a:defRPr>
-            </a:pPr>
-            <a:r>
-              <a:rPr sz="1200" b="1">
-                <a:solidFill>
-                  <a:srgbClr val="FFFFFF"/>
-                </a:solidFill>
-                <a:latin typeface="Microsoft YaHei"/>
-                <a:ea typeface="Microsoft YaHei"/>
-                <a:cs typeface="Microsoft YaHei"/>
-              </a:rPr>
-              <a:t>优势三</a:t>
-            </a:r>
-          </a:p>
-        </p:txBody>
-      </p:sp>
-      <p:sp>
-        <p:nvSpPr>
-          <p:cNvPr id="12" name="">
-            <a:extLst xmlns:a="http://schemas.openxmlformats.org/drawingml/2006/main">
-              <a:ext uri="{FF2B5EF4-FFF2-40B4-BE49-F238E27FC236}">
-                <a16:creationId xmlns:a16="http://schemas.microsoft.com/office/drawing/2014/main" id="{E04F8975-DF52-4DD5-9B83-661AE72DB301}"/>
-              </a:ext>
-            </a:extLst>
-          </p:cNvPr>
-          <p:cNvSpPr>
-            <a:spLocks xmlns:a="http://schemas.openxmlformats.org/drawingml/2006/main" noGrp="1"/>
-          </p:cNvSpPr>
-          <p:nvPr/>
-        </p:nvSpPr>
-        <p:spPr>
-          <a:xfrm xmlns:a="http://schemas.openxmlformats.org/drawingml/2006/main">
-            <a:off x="5572125" y="3095625"/>
-            <a:ext cx="1047750" cy="476250"/>
-          </a:xfrm>
-          <a:prstGeom xmlns:a="http://schemas.openxmlformats.org/drawingml/2006/main" prst="roundRect">
-            <a:avLst>
-              <a:gd name="adj" fmla="val 24000"/>
-            </a:avLst>
-          </a:prstGeom>
-          <a:solidFill xmlns:a="http://schemas.openxmlformats.org/drawingml/2006/main">
-            <a:srgbClr val="FFFFFF"/>
-          </a:solidFill>
-          <a:ln xmlns:a="http://schemas.openxmlformats.org/drawingml/2006/main" w="0">
-            <a:noFill/>
-            <a:prstDash val="solid"/>
-          </a:ln>
-        </p:spPr>
-        <p:txBody>
-          <a:bodyPr xmlns:a="http://schemas.openxmlformats.org/drawingml/2006/main" lIns="114300" tIns="76200" rIns="114300" bIns="76200" anchor="ctr">
-            <a:normAutofit fontScale="100000"/>
-          </a:bodyPr>
-          <a:lstStyle xmlns:a="http://schemas.openxmlformats.org/drawingml/2006/main"/>
-          <a:p xmlns:a="http://schemas.openxmlformats.org/drawingml/2006/main">
-            <a:pPr algn="ctr">
-              <a:defRPr sz="1350" b="1">
-                <a:solidFill>
-                  <a:srgbClr val="0F172A"/>
-                </a:solidFill>
-                <a:latin typeface="Microsoft YaHei"/>
-                <a:ea typeface="Microsoft YaHei"/>
-                <a:cs typeface="Microsoft YaHei"/>
-              </a:defRPr>
-            </a:pPr>
-            <a:r>
-              <a:rPr sz="1350" b="1">
-                <a:solidFill>
-                  <a:srgbClr val="0F172A"/>
-                </a:solidFill>
-                <a:latin typeface="Microsoft YaHei"/>
-                <a:ea typeface="Microsoft YaHei"/>
-                <a:cs typeface="Microsoft YaHei"/>
-              </a:rPr>
-              <a:t>共同目标</a:t>
-            </a:r>
-          </a:p>
-        </p:txBody>
+          </a:ln>
+        </p:spPr>
       </p:sp>
     </p:spTree>
     <p:extLst>
       <p:ext uri="{BB962C8B-B14F-4D97-AF65-F5344CB8AC3E}">
-        <p14:creationId xmlns:p14="http://schemas.microsoft.com/office/powerpoint/2010/main" val="1074793000"/>
+        <p14:creationId xmlns:p14="http://schemas.microsoft.com/office/powerpoint/2010/main" val="790962149"/>
       </p:ext>
     </p:extLst>
   </p:cSld>
